--- a/Python/Lesson 04 - Strings, Advanced Functions, and Virtual Environments/Lesson 04 - Strings, Virtual Environments, and Advanced Functions.pptx
+++ b/Python/Lesson 04 - Strings, Advanced Functions, and Virtual Environments/Lesson 04 - Strings, Virtual Environments, and Advanced Functions.pptx
@@ -5,45 +5,44 @@
     <p:sldMasterId id="2147483684" r:id="rId1"/>
   </p:sldMasterIdLst>
   <p:notesMasterIdLst>
-    <p:notesMasterId r:id="rId28"/>
+    <p:notesMasterId r:id="rId27"/>
   </p:notesMasterIdLst>
   <p:sldIdLst>
     <p:sldId id="256" r:id="rId2"/>
     <p:sldId id="502" r:id="rId3"/>
     <p:sldId id="486" r:id="rId4"/>
     <p:sldId id="491" r:id="rId5"/>
-    <p:sldId id="257" r:id="rId6"/>
-    <p:sldId id="490" r:id="rId7"/>
-    <p:sldId id="503" r:id="rId8"/>
-    <p:sldId id="492" r:id="rId9"/>
-    <p:sldId id="419" r:id="rId10"/>
-    <p:sldId id="504" r:id="rId11"/>
-    <p:sldId id="493" r:id="rId12"/>
-    <p:sldId id="500" r:id="rId13"/>
-    <p:sldId id="505" r:id="rId14"/>
-    <p:sldId id="506" r:id="rId15"/>
-    <p:sldId id="507" r:id="rId16"/>
-    <p:sldId id="508" r:id="rId17"/>
-    <p:sldId id="494" r:id="rId18"/>
-    <p:sldId id="433" r:id="rId19"/>
-    <p:sldId id="501" r:id="rId20"/>
-    <p:sldId id="510" r:id="rId21"/>
-    <p:sldId id="511" r:id="rId22"/>
-    <p:sldId id="512" r:id="rId23"/>
-    <p:sldId id="513" r:id="rId24"/>
-    <p:sldId id="514" r:id="rId25"/>
-    <p:sldId id="515" r:id="rId26"/>
-    <p:sldId id="476" r:id="rId27"/>
+    <p:sldId id="490" r:id="rId6"/>
+    <p:sldId id="503" r:id="rId7"/>
+    <p:sldId id="492" r:id="rId8"/>
+    <p:sldId id="419" r:id="rId9"/>
+    <p:sldId id="504" r:id="rId10"/>
+    <p:sldId id="493" r:id="rId11"/>
+    <p:sldId id="500" r:id="rId12"/>
+    <p:sldId id="505" r:id="rId13"/>
+    <p:sldId id="506" r:id="rId14"/>
+    <p:sldId id="507" r:id="rId15"/>
+    <p:sldId id="508" r:id="rId16"/>
+    <p:sldId id="494" r:id="rId17"/>
+    <p:sldId id="433" r:id="rId18"/>
+    <p:sldId id="501" r:id="rId19"/>
+    <p:sldId id="510" r:id="rId20"/>
+    <p:sldId id="511" r:id="rId21"/>
+    <p:sldId id="512" r:id="rId22"/>
+    <p:sldId id="513" r:id="rId23"/>
+    <p:sldId id="514" r:id="rId24"/>
+    <p:sldId id="515" r:id="rId25"/>
+    <p:sldId id="476" r:id="rId26"/>
   </p:sldIdLst>
   <p:sldSz cx="9144000" cy="5143500" type="screen16x9"/>
   <p:notesSz cx="6858000" cy="9144000"/>
   <p:embeddedFontLst>
     <p:embeddedFont>
       <p:font typeface="Roboto" panose="02000000000000000000" pitchFamily="2" charset="0"/>
-      <p:regular r:id="rId29"/>
-      <p:bold r:id="rId30"/>
-      <p:italic r:id="rId31"/>
-      <p:boldItalic r:id="rId32"/>
+      <p:regular r:id="rId28"/>
+      <p:bold r:id="rId29"/>
+      <p:italic r:id="rId30"/>
+      <p:boldItalic r:id="rId31"/>
     </p:embeddedFont>
   </p:embeddedFontLst>
   <p:defaultTextStyle>
@@ -996,133 +995,6 @@
 </file>
 
 <file path=ppt/notesSlides/notesSlide10.xml><?xml version="1.0" encoding="utf-8"?>
-<p:notes xmlns:a="http://schemas.openxmlformats.org/drawingml/2006/main" xmlns:r="http://schemas.openxmlformats.org/officeDocument/2006/relationships" xmlns:p="http://schemas.openxmlformats.org/presentationml/2006/main" showMasterSp="0" showMasterPhAnim="0">
-  <p:cSld>
-    <p:spTree>
-      <p:nvGrpSpPr>
-        <p:cNvPr id="1" name="Shape 61">
-          <a:extLst>
-            <a:ext uri="{FF2B5EF4-FFF2-40B4-BE49-F238E27FC236}">
-              <a16:creationId xmlns:a16="http://schemas.microsoft.com/office/drawing/2014/main" id="{D89AE080-C45E-DF21-44ED-1AB50E218F0E}"/>
-            </a:ext>
-          </a:extLst>
-        </p:cNvPr>
-        <p:cNvGrpSpPr/>
-        <p:nvPr/>
-      </p:nvGrpSpPr>
-      <p:grpSpPr>
-        <a:xfrm>
-          <a:off x="0" y="0"/>
-          <a:ext cx="0" cy="0"/>
-          <a:chOff x="0" y="0"/>
-          <a:chExt cx="0" cy="0"/>
-        </a:xfrm>
-      </p:grpSpPr>
-      <p:sp>
-        <p:nvSpPr>
-          <p:cNvPr id="62" name="Google Shape;62;g37105969b97_1_0:notes">
-            <a:extLst>
-              <a:ext uri="{FF2B5EF4-FFF2-40B4-BE49-F238E27FC236}">
-                <a16:creationId xmlns:a16="http://schemas.microsoft.com/office/drawing/2014/main" id="{2370BDB3-BCB9-99B6-7EA6-1E3BDB0799BE}"/>
-              </a:ext>
-            </a:extLst>
-          </p:cNvPr>
-          <p:cNvSpPr>
-            <a:spLocks noGrp="1" noRot="1" noChangeAspect="1"/>
-          </p:cNvSpPr>
-          <p:nvPr>
-            <p:ph type="sldImg" idx="2"/>
-          </p:nvPr>
-        </p:nvSpPr>
-        <p:spPr>
-          <a:xfrm>
-            <a:off x="381000" y="685800"/>
-            <a:ext cx="6096000" cy="3429000"/>
-          </a:xfrm>
-          <a:custGeom>
-            <a:avLst/>
-            <a:gdLst/>
-            <a:ahLst/>
-            <a:cxnLst/>
-            <a:rect l="l" t="t" r="r" b="b"/>
-            <a:pathLst>
-              <a:path w="120000" h="120000" extrusionOk="0">
-                <a:moveTo>
-                  <a:pt x="0" y="0"/>
-                </a:moveTo>
-                <a:lnTo>
-                  <a:pt x="120000" y="0"/>
-                </a:lnTo>
-                <a:lnTo>
-                  <a:pt x="120000" y="120000"/>
-                </a:lnTo>
-                <a:lnTo>
-                  <a:pt x="0" y="120000"/>
-                </a:lnTo>
-                <a:close/>
-              </a:path>
-            </a:pathLst>
-          </a:custGeom>
-        </p:spPr>
-      </p:sp>
-      <p:sp>
-        <p:nvSpPr>
-          <p:cNvPr id="63" name="Google Shape;63;g37105969b97_1_0:notes">
-            <a:extLst>
-              <a:ext uri="{FF2B5EF4-FFF2-40B4-BE49-F238E27FC236}">
-                <a16:creationId xmlns:a16="http://schemas.microsoft.com/office/drawing/2014/main" id="{AC379ED3-A3BE-FD9E-8436-9DFA42CF74D0}"/>
-              </a:ext>
-            </a:extLst>
-          </p:cNvPr>
-          <p:cNvSpPr txBox="1">
-            <a:spLocks noGrp="1"/>
-          </p:cNvSpPr>
-          <p:nvPr>
-            <p:ph type="body" idx="1"/>
-          </p:nvPr>
-        </p:nvSpPr>
-        <p:spPr>
-          <a:xfrm>
-            <a:off x="685800" y="4343400"/>
-            <a:ext cx="5486400" cy="4114800"/>
-          </a:xfrm>
-          <a:prstGeom prst="rect">
-            <a:avLst/>
-          </a:prstGeom>
-        </p:spPr>
-        <p:txBody>
-          <a:bodyPr spcFirstLastPara="1" wrap="square" lIns="91425" tIns="91425" rIns="91425" bIns="91425" anchor="t" anchorCtr="0">
-            <a:noAutofit/>
-          </a:bodyPr>
-          <a:lstStyle/>
-          <a:p>
-            <a:pPr marL="0" lvl="0" indent="0" algn="l" rtl="0">
-              <a:spcBef>
-                <a:spcPts val="0"/>
-              </a:spcBef>
-              <a:spcAft>
-                <a:spcPts val="0"/>
-              </a:spcAft>
-              <a:buNone/>
-            </a:pPr>
-            <a:endParaRPr dirty="0"/>
-          </a:p>
-        </p:txBody>
-      </p:sp>
-    </p:spTree>
-    <p:extLst>
-      <p:ext uri="{BB962C8B-B14F-4D97-AF65-F5344CB8AC3E}">
-        <p14:creationId xmlns:p14="http://schemas.microsoft.com/office/powerpoint/2010/main" val="3102670015"/>
-      </p:ext>
-    </p:extLst>
-  </p:cSld>
-  <p:clrMapOvr>
-    <a:masterClrMapping/>
-  </p:clrMapOvr>
-</p:notes>
-</file>
-
-<file path=ppt/notesSlides/notesSlide11.xml><?xml version="1.0" encoding="utf-8"?>
 <p:notes xmlns:a="http://schemas.openxmlformats.org/drawingml/2006/main" xmlns:r="http://schemas.openxmlformats.org/officeDocument/2006/relationships" xmlns:p="http://schemas.openxmlformats.org/presentationml/2006/main">
   <p:cSld>
     <p:spTree>
@@ -1227,7 +1099,7 @@
               <a:pPr>
                 <a:defRPr/>
               </a:pPr>
-              <a:t>11</a:t>
+              <a:t>10</a:t>
             </a:fld>
             <a:endParaRPr lang="en-US" altLang="en-US"/>
           </a:p>
@@ -1246,7 +1118,7 @@
 </p:notes>
 </file>
 
-<file path=ppt/notesSlides/notesSlide12.xml><?xml version="1.0" encoding="utf-8"?>
+<file path=ppt/notesSlides/notesSlide11.xml><?xml version="1.0" encoding="utf-8"?>
 <p:notes xmlns:a="http://schemas.openxmlformats.org/drawingml/2006/main" xmlns:r="http://schemas.openxmlformats.org/officeDocument/2006/relationships" xmlns:p="http://schemas.openxmlformats.org/presentationml/2006/main">
   <p:cSld>
     <p:spTree>
@@ -1371,7 +1243,7 @@
               <a:pPr>
                 <a:defRPr/>
               </a:pPr>
-              <a:t>12</a:t>
+              <a:t>11</a:t>
             </a:fld>
             <a:endParaRPr lang="en-US" altLang="en-US"/>
           </a:p>
@@ -1390,7 +1262,7 @@
 </p:notes>
 </file>
 
-<file path=ppt/notesSlides/notesSlide13.xml><?xml version="1.0" encoding="utf-8"?>
+<file path=ppt/notesSlides/notesSlide12.xml><?xml version="1.0" encoding="utf-8"?>
 <p:notes xmlns:a="http://schemas.openxmlformats.org/drawingml/2006/main" xmlns:r="http://schemas.openxmlformats.org/officeDocument/2006/relationships" xmlns:p="http://schemas.openxmlformats.org/presentationml/2006/main">
   <p:cSld>
     <p:spTree>
@@ -1515,7 +1387,7 @@
               <a:pPr>
                 <a:defRPr/>
               </a:pPr>
-              <a:t>13</a:t>
+              <a:t>12</a:t>
             </a:fld>
             <a:endParaRPr lang="en-US" altLang="en-US"/>
           </a:p>
@@ -1534,7 +1406,7 @@
 </p:notes>
 </file>
 
-<file path=ppt/notesSlides/notesSlide14.xml><?xml version="1.0" encoding="utf-8"?>
+<file path=ppt/notesSlides/notesSlide13.xml><?xml version="1.0" encoding="utf-8"?>
 <p:notes xmlns:a="http://schemas.openxmlformats.org/drawingml/2006/main" xmlns:r="http://schemas.openxmlformats.org/officeDocument/2006/relationships" xmlns:p="http://schemas.openxmlformats.org/presentationml/2006/main">
   <p:cSld>
     <p:spTree>
@@ -1628,7 +1500,7 @@
           <a:p>
             <a:fld id="{292570D5-C374-43AE-876B-55C2A221664E}" type="slidenum">
               <a:rPr lang="en-US" smtClean="0"/>
-              <a:t>14</a:t>
+              <a:t>13</a:t>
             </a:fld>
             <a:endParaRPr lang="en-US"/>
           </a:p>
@@ -1647,7 +1519,7 @@
 </p:notes>
 </file>
 
-<file path=ppt/notesSlides/notesSlide15.xml><?xml version="1.0" encoding="utf-8"?>
+<file path=ppt/notesSlides/notesSlide14.xml><?xml version="1.0" encoding="utf-8"?>
 <p:notes xmlns:a="http://schemas.openxmlformats.org/drawingml/2006/main" xmlns:r="http://schemas.openxmlformats.org/officeDocument/2006/relationships" xmlns:p="http://schemas.openxmlformats.org/presentationml/2006/main">
   <p:cSld>
     <p:spTree>
@@ -1741,7 +1613,7 @@
           <a:p>
             <a:fld id="{292570D5-C374-43AE-876B-55C2A221664E}" type="slidenum">
               <a:rPr lang="en-US" smtClean="0"/>
-              <a:t>15</a:t>
+              <a:t>14</a:t>
             </a:fld>
             <a:endParaRPr lang="en-US"/>
           </a:p>
@@ -1760,7 +1632,7 @@
 </p:notes>
 </file>
 
-<file path=ppt/notesSlides/notesSlide16.xml><?xml version="1.0" encoding="utf-8"?>
+<file path=ppt/notesSlides/notesSlide15.xml><?xml version="1.0" encoding="utf-8"?>
 <p:notes xmlns:a="http://schemas.openxmlformats.org/drawingml/2006/main" xmlns:r="http://schemas.openxmlformats.org/officeDocument/2006/relationships" xmlns:p="http://schemas.openxmlformats.org/presentationml/2006/main">
   <p:cSld>
     <p:spTree>
@@ -1854,7 +1726,7 @@
           <a:p>
             <a:fld id="{292570D5-C374-43AE-876B-55C2A221664E}" type="slidenum">
               <a:rPr lang="en-US" smtClean="0"/>
-              <a:t>16</a:t>
+              <a:t>15</a:t>
             </a:fld>
             <a:endParaRPr lang="en-US"/>
           </a:p>
@@ -1873,7 +1745,7 @@
 </p:notes>
 </file>
 
-<file path=ppt/notesSlides/notesSlide17.xml><?xml version="1.0" encoding="utf-8"?>
+<file path=ppt/notesSlides/notesSlide16.xml><?xml version="1.0" encoding="utf-8"?>
 <p:notes xmlns:a="http://schemas.openxmlformats.org/drawingml/2006/main" xmlns:r="http://schemas.openxmlformats.org/officeDocument/2006/relationships" xmlns:p="http://schemas.openxmlformats.org/presentationml/2006/main">
   <p:cSld>
     <p:spTree>
@@ -1998,7 +1870,7 @@
               <a:pPr>
                 <a:defRPr/>
               </a:pPr>
-              <a:t>17</a:t>
+              <a:t>16</a:t>
             </a:fld>
             <a:endParaRPr lang="en-US" altLang="en-US"/>
           </a:p>
@@ -2017,7 +1889,7 @@
 </p:notes>
 </file>
 
-<file path=ppt/notesSlides/notesSlide18.xml><?xml version="1.0" encoding="utf-8"?>
+<file path=ppt/notesSlides/notesSlide17.xml><?xml version="1.0" encoding="utf-8"?>
 <p:notes xmlns:a="http://schemas.openxmlformats.org/drawingml/2006/main" xmlns:r="http://schemas.openxmlformats.org/officeDocument/2006/relationships" xmlns:p="http://schemas.openxmlformats.org/presentationml/2006/main">
   <p:cSld>
     <p:spTree>
@@ -2095,7 +1967,7 @@
               <a:pPr>
                 <a:defRPr/>
               </a:pPr>
-              <a:t>18</a:t>
+              <a:t>17</a:t>
             </a:fld>
             <a:endParaRPr lang="en-US" altLang="en-US"/>
           </a:p>
@@ -2114,7 +1986,7 @@
 </p:notes>
 </file>
 
-<file path=ppt/notesSlides/notesSlide19.xml><?xml version="1.0" encoding="utf-8"?>
+<file path=ppt/notesSlides/notesSlide18.xml><?xml version="1.0" encoding="utf-8"?>
 <p:notes xmlns:a="http://schemas.openxmlformats.org/drawingml/2006/main" xmlns:r="http://schemas.openxmlformats.org/officeDocument/2006/relationships" xmlns:p="http://schemas.openxmlformats.org/presentationml/2006/main">
   <p:cSld>
     <p:spTree>
@@ -2208,7 +2080,7 @@
           <a:p>
             <a:fld id="{292570D5-C374-43AE-876B-55C2A221664E}" type="slidenum">
               <a:rPr lang="en-US" smtClean="0"/>
-              <a:t>19</a:t>
+              <a:t>18</a:t>
             </a:fld>
             <a:endParaRPr lang="en-US"/>
           </a:p>
@@ -2218,6 +2090,127 @@
     <p:extLst>
       <p:ext uri="{BB962C8B-B14F-4D97-AF65-F5344CB8AC3E}">
         <p14:creationId xmlns:p14="http://schemas.microsoft.com/office/powerpoint/2010/main" val="997511759"/>
+      </p:ext>
+    </p:extLst>
+  </p:cSld>
+  <p:clrMapOvr>
+    <a:masterClrMapping/>
+  </p:clrMapOvr>
+</p:notes>
+</file>
+
+<file path=ppt/notesSlides/notesSlide19.xml><?xml version="1.0" encoding="utf-8"?>
+<p:notes xmlns:a="http://schemas.openxmlformats.org/drawingml/2006/main" xmlns:r="http://schemas.openxmlformats.org/officeDocument/2006/relationships" xmlns:p="http://schemas.openxmlformats.org/presentationml/2006/main">
+  <p:cSld>
+    <p:spTree>
+      <p:nvGrpSpPr>
+        <p:cNvPr id="1" name="">
+          <a:extLst>
+            <a:ext uri="{FF2B5EF4-FFF2-40B4-BE49-F238E27FC236}">
+              <a16:creationId xmlns:a16="http://schemas.microsoft.com/office/drawing/2014/main" id="{9CC31425-54C9-1153-5689-F47A93C40AA0}"/>
+            </a:ext>
+          </a:extLst>
+        </p:cNvPr>
+        <p:cNvGrpSpPr/>
+        <p:nvPr/>
+      </p:nvGrpSpPr>
+      <p:grpSpPr>
+        <a:xfrm>
+          <a:off x="0" y="0"/>
+          <a:ext cx="0" cy="0"/>
+          <a:chOff x="0" y="0"/>
+          <a:chExt cx="0" cy="0"/>
+        </a:xfrm>
+      </p:grpSpPr>
+      <p:sp>
+        <p:nvSpPr>
+          <p:cNvPr id="2" name="Slide Image Placeholder 1">
+            <a:extLst>
+              <a:ext uri="{FF2B5EF4-FFF2-40B4-BE49-F238E27FC236}">
+                <a16:creationId xmlns:a16="http://schemas.microsoft.com/office/drawing/2014/main" id="{022AE665-8EA2-6666-D626-64A964CB738C}"/>
+              </a:ext>
+            </a:extLst>
+          </p:cNvPr>
+          <p:cNvSpPr>
+            <a:spLocks noGrp="1" noRot="1" noChangeAspect="1"/>
+          </p:cNvSpPr>
+          <p:nvPr>
+            <p:ph type="sldImg"/>
+          </p:nvPr>
+        </p:nvSpPr>
+        <p:spPr>
+          <a:xfrm>
+            <a:off x="381000" y="685800"/>
+            <a:ext cx="6096000" cy="3429000"/>
+          </a:xfrm>
+        </p:spPr>
+      </p:sp>
+      <p:sp>
+        <p:nvSpPr>
+          <p:cNvPr id="3" name="Notes Placeholder 2">
+            <a:extLst>
+              <a:ext uri="{FF2B5EF4-FFF2-40B4-BE49-F238E27FC236}">
+                <a16:creationId xmlns:a16="http://schemas.microsoft.com/office/drawing/2014/main" id="{4B7FFCD6-7183-6F41-E9AE-DD89AC8EA75E}"/>
+              </a:ext>
+            </a:extLst>
+          </p:cNvPr>
+          <p:cNvSpPr>
+            <a:spLocks noGrp="1"/>
+          </p:cNvSpPr>
+          <p:nvPr>
+            <p:ph type="body" idx="1"/>
+          </p:nvPr>
+        </p:nvSpPr>
+        <p:spPr/>
+        <p:txBody>
+          <a:bodyPr>
+            <a:normAutofit/>
+          </a:bodyPr>
+          <a:lstStyle/>
+          <a:p>
+            <a:endParaRPr lang="en-US" dirty="0"/>
+          </a:p>
+        </p:txBody>
+      </p:sp>
+      <p:sp>
+        <p:nvSpPr>
+          <p:cNvPr id="4" name="Slide Number Placeholder 3">
+            <a:extLst>
+              <a:ext uri="{FF2B5EF4-FFF2-40B4-BE49-F238E27FC236}">
+                <a16:creationId xmlns:a16="http://schemas.microsoft.com/office/drawing/2014/main" id="{B33A06C6-06D4-1DC2-1249-1520114D8534}"/>
+              </a:ext>
+            </a:extLst>
+          </p:cNvPr>
+          <p:cNvSpPr>
+            <a:spLocks noGrp="1"/>
+          </p:cNvSpPr>
+          <p:nvPr>
+            <p:ph type="sldNum" sz="quarter" idx="5"/>
+          </p:nvPr>
+        </p:nvSpPr>
+        <p:spPr/>
+        <p:txBody>
+          <a:bodyPr/>
+          <a:lstStyle/>
+          <a:p>
+            <a:pPr>
+              <a:defRPr/>
+            </a:pPr>
+            <a:fld id="{18B4ECCA-5441-478E-8672-6AB21BB71BD9}" type="slidenum">
+              <a:rPr lang="en-US" altLang="en-US" smtClean="0"/>
+              <a:pPr>
+                <a:defRPr/>
+              </a:pPr>
+              <a:t>19</a:t>
+            </a:fld>
+            <a:endParaRPr lang="en-US" altLang="en-US"/>
+          </a:p>
+        </p:txBody>
+      </p:sp>
+    </p:spTree>
+    <p:extLst>
+      <p:ext uri="{BB962C8B-B14F-4D97-AF65-F5344CB8AC3E}">
+        <p14:creationId xmlns:p14="http://schemas.microsoft.com/office/powerpoint/2010/main" val="708666650"/>
       </p:ext>
     </p:extLst>
   </p:cSld>
@@ -2348,127 +2341,6 @@
         <p:cNvPr id="1" name="">
           <a:extLst>
             <a:ext uri="{FF2B5EF4-FFF2-40B4-BE49-F238E27FC236}">
-              <a16:creationId xmlns:a16="http://schemas.microsoft.com/office/drawing/2014/main" id="{9CC31425-54C9-1153-5689-F47A93C40AA0}"/>
-            </a:ext>
-          </a:extLst>
-        </p:cNvPr>
-        <p:cNvGrpSpPr/>
-        <p:nvPr/>
-      </p:nvGrpSpPr>
-      <p:grpSpPr>
-        <a:xfrm>
-          <a:off x="0" y="0"/>
-          <a:ext cx="0" cy="0"/>
-          <a:chOff x="0" y="0"/>
-          <a:chExt cx="0" cy="0"/>
-        </a:xfrm>
-      </p:grpSpPr>
-      <p:sp>
-        <p:nvSpPr>
-          <p:cNvPr id="2" name="Slide Image Placeholder 1">
-            <a:extLst>
-              <a:ext uri="{FF2B5EF4-FFF2-40B4-BE49-F238E27FC236}">
-                <a16:creationId xmlns:a16="http://schemas.microsoft.com/office/drawing/2014/main" id="{022AE665-8EA2-6666-D626-64A964CB738C}"/>
-              </a:ext>
-            </a:extLst>
-          </p:cNvPr>
-          <p:cNvSpPr>
-            <a:spLocks noGrp="1" noRot="1" noChangeAspect="1"/>
-          </p:cNvSpPr>
-          <p:nvPr>
-            <p:ph type="sldImg"/>
-          </p:nvPr>
-        </p:nvSpPr>
-        <p:spPr>
-          <a:xfrm>
-            <a:off x="381000" y="685800"/>
-            <a:ext cx="6096000" cy="3429000"/>
-          </a:xfrm>
-        </p:spPr>
-      </p:sp>
-      <p:sp>
-        <p:nvSpPr>
-          <p:cNvPr id="3" name="Notes Placeholder 2">
-            <a:extLst>
-              <a:ext uri="{FF2B5EF4-FFF2-40B4-BE49-F238E27FC236}">
-                <a16:creationId xmlns:a16="http://schemas.microsoft.com/office/drawing/2014/main" id="{4B7FFCD6-7183-6F41-E9AE-DD89AC8EA75E}"/>
-              </a:ext>
-            </a:extLst>
-          </p:cNvPr>
-          <p:cNvSpPr>
-            <a:spLocks noGrp="1"/>
-          </p:cNvSpPr>
-          <p:nvPr>
-            <p:ph type="body" idx="1"/>
-          </p:nvPr>
-        </p:nvSpPr>
-        <p:spPr/>
-        <p:txBody>
-          <a:bodyPr>
-            <a:normAutofit/>
-          </a:bodyPr>
-          <a:lstStyle/>
-          <a:p>
-            <a:endParaRPr lang="en-US" dirty="0"/>
-          </a:p>
-        </p:txBody>
-      </p:sp>
-      <p:sp>
-        <p:nvSpPr>
-          <p:cNvPr id="4" name="Slide Number Placeholder 3">
-            <a:extLst>
-              <a:ext uri="{FF2B5EF4-FFF2-40B4-BE49-F238E27FC236}">
-                <a16:creationId xmlns:a16="http://schemas.microsoft.com/office/drawing/2014/main" id="{B33A06C6-06D4-1DC2-1249-1520114D8534}"/>
-              </a:ext>
-            </a:extLst>
-          </p:cNvPr>
-          <p:cNvSpPr>
-            <a:spLocks noGrp="1"/>
-          </p:cNvSpPr>
-          <p:nvPr>
-            <p:ph type="sldNum" sz="quarter" idx="5"/>
-          </p:nvPr>
-        </p:nvSpPr>
-        <p:spPr/>
-        <p:txBody>
-          <a:bodyPr/>
-          <a:lstStyle/>
-          <a:p>
-            <a:pPr>
-              <a:defRPr/>
-            </a:pPr>
-            <a:fld id="{18B4ECCA-5441-478E-8672-6AB21BB71BD9}" type="slidenum">
-              <a:rPr lang="en-US" altLang="en-US" smtClean="0"/>
-              <a:pPr>
-                <a:defRPr/>
-              </a:pPr>
-              <a:t>20</a:t>
-            </a:fld>
-            <a:endParaRPr lang="en-US" altLang="en-US"/>
-          </a:p>
-        </p:txBody>
-      </p:sp>
-    </p:spTree>
-    <p:extLst>
-      <p:ext uri="{BB962C8B-B14F-4D97-AF65-F5344CB8AC3E}">
-        <p14:creationId xmlns:p14="http://schemas.microsoft.com/office/powerpoint/2010/main" val="708666650"/>
-      </p:ext>
-    </p:extLst>
-  </p:cSld>
-  <p:clrMapOvr>
-    <a:masterClrMapping/>
-  </p:clrMapOvr>
-</p:notes>
-</file>
-
-<file path=ppt/notesSlides/notesSlide21.xml><?xml version="1.0" encoding="utf-8"?>
-<p:notes xmlns:a="http://schemas.openxmlformats.org/drawingml/2006/main" xmlns:r="http://schemas.openxmlformats.org/officeDocument/2006/relationships" xmlns:p="http://schemas.openxmlformats.org/presentationml/2006/main">
-  <p:cSld>
-    <p:spTree>
-      <p:nvGrpSpPr>
-        <p:cNvPr id="1" name="">
-          <a:extLst>
-            <a:ext uri="{FF2B5EF4-FFF2-40B4-BE49-F238E27FC236}">
               <a16:creationId xmlns:a16="http://schemas.microsoft.com/office/drawing/2014/main" id="{6C58A1B2-85FA-B0A5-F422-5F22667C6F78}"/>
             </a:ext>
           </a:extLst>
@@ -2563,7 +2435,7 @@
               <a:pPr>
                 <a:defRPr/>
               </a:pPr>
-              <a:t>21</a:t>
+              <a:t>20</a:t>
             </a:fld>
             <a:endParaRPr lang="en-US" altLang="en-US"/>
           </a:p>
@@ -2582,7 +2454,7 @@
 </p:notes>
 </file>
 
-<file path=ppt/notesSlides/notesSlide22.xml><?xml version="1.0" encoding="utf-8"?>
+<file path=ppt/notesSlides/notesSlide21.xml><?xml version="1.0" encoding="utf-8"?>
 <p:notes xmlns:a="http://schemas.openxmlformats.org/drawingml/2006/main" xmlns:r="http://schemas.openxmlformats.org/officeDocument/2006/relationships" xmlns:p="http://schemas.openxmlformats.org/presentationml/2006/main">
   <p:cSld>
     <p:spTree>
@@ -2684,7 +2556,7 @@
               <a:pPr>
                 <a:defRPr/>
               </a:pPr>
-              <a:t>22</a:t>
+              <a:t>21</a:t>
             </a:fld>
             <a:endParaRPr lang="en-US" altLang="en-US"/>
           </a:p>
@@ -2703,7 +2575,7 @@
 </p:notes>
 </file>
 
-<file path=ppt/notesSlides/notesSlide23.xml><?xml version="1.0" encoding="utf-8"?>
+<file path=ppt/notesSlides/notesSlide22.xml><?xml version="1.0" encoding="utf-8"?>
 <p:notes xmlns:a="http://schemas.openxmlformats.org/drawingml/2006/main" xmlns:r="http://schemas.openxmlformats.org/officeDocument/2006/relationships" xmlns:p="http://schemas.openxmlformats.org/presentationml/2006/main">
   <p:cSld>
     <p:spTree>
@@ -2805,7 +2677,7 @@
               <a:pPr>
                 <a:defRPr/>
               </a:pPr>
-              <a:t>23</a:t>
+              <a:t>22</a:t>
             </a:fld>
             <a:endParaRPr lang="en-US" altLang="en-US"/>
           </a:p>
@@ -2824,7 +2696,7 @@
 </p:notes>
 </file>
 
-<file path=ppt/notesSlides/notesSlide24.xml><?xml version="1.0" encoding="utf-8"?>
+<file path=ppt/notesSlides/notesSlide23.xml><?xml version="1.0" encoding="utf-8"?>
 <p:notes xmlns:a="http://schemas.openxmlformats.org/drawingml/2006/main" xmlns:r="http://schemas.openxmlformats.org/officeDocument/2006/relationships" xmlns:p="http://schemas.openxmlformats.org/presentationml/2006/main">
   <p:cSld>
     <p:spTree>
@@ -2926,7 +2798,7 @@
               <a:pPr>
                 <a:defRPr/>
               </a:pPr>
-              <a:t>24</a:t>
+              <a:t>23</a:t>
             </a:fld>
             <a:endParaRPr lang="en-US" altLang="en-US"/>
           </a:p>
@@ -2945,7 +2817,7 @@
 </p:notes>
 </file>
 
-<file path=ppt/notesSlides/notesSlide25.xml><?xml version="1.0" encoding="utf-8"?>
+<file path=ppt/notesSlides/notesSlide24.xml><?xml version="1.0" encoding="utf-8"?>
 <p:notes xmlns:a="http://schemas.openxmlformats.org/drawingml/2006/main" xmlns:r="http://schemas.openxmlformats.org/officeDocument/2006/relationships" xmlns:p="http://schemas.openxmlformats.org/presentationml/2006/main">
   <p:cSld>
     <p:spTree>
@@ -3047,7 +2919,7 @@
               <a:pPr>
                 <a:defRPr/>
               </a:pPr>
-              <a:t>25</a:t>
+              <a:t>24</a:t>
             </a:fld>
             <a:endParaRPr lang="en-US" altLang="en-US"/>
           </a:p>
@@ -3066,7 +2938,7 @@
 </p:notes>
 </file>
 
-<file path=ppt/notesSlides/notesSlide26.xml><?xml version="1.0" encoding="utf-8"?>
+<file path=ppt/notesSlides/notesSlide25.xml><?xml version="1.0" encoding="utf-8"?>
 <p:notes xmlns:a="http://schemas.openxmlformats.org/drawingml/2006/main" xmlns:r="http://schemas.openxmlformats.org/officeDocument/2006/relationships" xmlns:p="http://schemas.openxmlformats.org/presentationml/2006/main">
   <p:cSld>
     <p:spTree>
@@ -3142,7 +3014,7 @@
               <a:pPr>
                 <a:defRPr/>
               </a:pPr>
-              <a:t>26</a:t>
+              <a:t>25</a:t>
             </a:fld>
             <a:endParaRPr lang="en-US" altLang="en-US" dirty="0"/>
           </a:p>
@@ -3392,110 +3264,6 @@
   <p:cSld>
     <p:spTree>
       <p:nvGrpSpPr>
-        <p:cNvPr id="1" name="Shape 56"/>
-        <p:cNvGrpSpPr/>
-        <p:nvPr/>
-      </p:nvGrpSpPr>
-      <p:grpSpPr>
-        <a:xfrm>
-          <a:off x="0" y="0"/>
-          <a:ext cx="0" cy="0"/>
-          <a:chOff x="0" y="0"/>
-          <a:chExt cx="0" cy="0"/>
-        </a:xfrm>
-      </p:grpSpPr>
-      <p:sp>
-        <p:nvSpPr>
-          <p:cNvPr id="57" name="Google Shape;57;g37105969b97_0_0:notes"/>
-          <p:cNvSpPr>
-            <a:spLocks noGrp="1" noRot="1" noChangeAspect="1"/>
-          </p:cNvSpPr>
-          <p:nvPr>
-            <p:ph type="sldImg" idx="2"/>
-          </p:nvPr>
-        </p:nvSpPr>
-        <p:spPr>
-          <a:xfrm>
-            <a:off x="381000" y="685800"/>
-            <a:ext cx="6096000" cy="3429000"/>
-          </a:xfrm>
-          <a:custGeom>
-            <a:avLst/>
-            <a:gdLst/>
-            <a:ahLst/>
-            <a:cxnLst/>
-            <a:rect l="l" t="t" r="r" b="b"/>
-            <a:pathLst>
-              <a:path w="120000" h="120000" extrusionOk="0">
-                <a:moveTo>
-                  <a:pt x="0" y="0"/>
-                </a:moveTo>
-                <a:lnTo>
-                  <a:pt x="120000" y="0"/>
-                </a:lnTo>
-                <a:lnTo>
-                  <a:pt x="120000" y="120000"/>
-                </a:lnTo>
-                <a:lnTo>
-                  <a:pt x="0" y="120000"/>
-                </a:lnTo>
-                <a:close/>
-              </a:path>
-            </a:pathLst>
-          </a:custGeom>
-        </p:spPr>
-      </p:sp>
-      <p:sp>
-        <p:nvSpPr>
-          <p:cNvPr id="58" name="Google Shape;58;g37105969b97_0_0:notes"/>
-          <p:cNvSpPr txBox="1">
-            <a:spLocks noGrp="1"/>
-          </p:cNvSpPr>
-          <p:nvPr>
-            <p:ph type="body" idx="1"/>
-          </p:nvPr>
-        </p:nvSpPr>
-        <p:spPr>
-          <a:xfrm>
-            <a:off x="685800" y="4343400"/>
-            <a:ext cx="5486400" cy="4114800"/>
-          </a:xfrm>
-          <a:prstGeom prst="rect">
-            <a:avLst/>
-          </a:prstGeom>
-        </p:spPr>
-        <p:txBody>
-          <a:bodyPr spcFirstLastPara="1" wrap="square" lIns="91425" tIns="91425" rIns="91425" bIns="91425" anchor="t" anchorCtr="0">
-            <a:noAutofit/>
-          </a:bodyPr>
-          <a:lstStyle/>
-          <a:p>
-            <a:pPr marL="0" lvl="0" indent="0" algn="l" rtl="0">
-              <a:spcBef>
-                <a:spcPts val="0"/>
-              </a:spcBef>
-              <a:spcAft>
-                <a:spcPts val="0"/>
-              </a:spcAft>
-              <a:buNone/>
-            </a:pPr>
-            <a:endParaRPr/>
-          </a:p>
-        </p:txBody>
-      </p:sp>
-    </p:spTree>
-  </p:cSld>
-  <p:clrMapOvr>
-    <a:masterClrMapping/>
-  </p:clrMapOvr>
-</p:notes>
-</file>
-
-<file path=ppt/notesSlides/notesSlide6.xml><?xml version="1.0" encoding="utf-8"?>
-<p:notes xmlns:a="http://schemas.openxmlformats.org/drawingml/2006/main" xmlns:r="http://schemas.openxmlformats.org/officeDocument/2006/relationships" xmlns:p="http://schemas.openxmlformats.org/presentationml/2006/main" showMasterSp="0" showMasterPhAnim="0">
-  <p:cSld>
-    <p:spTree>
-      <p:nvGrpSpPr>
         <p:cNvPr id="1" name="Shape 61"/>
         <p:cNvGrpSpPr/>
         <p:nvPr/>
@@ -3595,7 +3363,7 @@
 </p:notes>
 </file>
 
-<file path=ppt/notesSlides/notesSlide7.xml><?xml version="1.0" encoding="utf-8"?>
+<file path=ppt/notesSlides/notesSlide6.xml><?xml version="1.0" encoding="utf-8"?>
 <p:notes xmlns:a="http://schemas.openxmlformats.org/drawingml/2006/main" xmlns:r="http://schemas.openxmlformats.org/officeDocument/2006/relationships" xmlns:p="http://schemas.openxmlformats.org/presentationml/2006/main" showMasterSp="0" showMasterPhAnim="0">
   <p:cSld>
     <p:spTree>
@@ -3722,7 +3490,7 @@
 </p:notes>
 </file>
 
-<file path=ppt/notesSlides/notesSlide8.xml><?xml version="1.0" encoding="utf-8"?>
+<file path=ppt/notesSlides/notesSlide7.xml><?xml version="1.0" encoding="utf-8"?>
 <p:notes xmlns:a="http://schemas.openxmlformats.org/drawingml/2006/main" xmlns:r="http://schemas.openxmlformats.org/officeDocument/2006/relationships" xmlns:p="http://schemas.openxmlformats.org/presentationml/2006/main">
   <p:cSld>
     <p:spTree>
@@ -3816,7 +3584,7 @@
           <a:p>
             <a:fld id="{292570D5-C374-43AE-876B-55C2A221664E}" type="slidenum">
               <a:rPr lang="en-US" smtClean="0"/>
-              <a:t>8</a:t>
+              <a:t>7</a:t>
             </a:fld>
             <a:endParaRPr lang="en-US"/>
           </a:p>
@@ -3835,7 +3603,7 @@
 </p:notes>
 </file>
 
-<file path=ppt/notesSlides/notesSlide9.xml><?xml version="1.0" encoding="utf-8"?>
+<file path=ppt/notesSlides/notesSlide8.xml><?xml version="1.0" encoding="utf-8"?>
 <p:notes xmlns:a="http://schemas.openxmlformats.org/drawingml/2006/main" xmlns:r="http://schemas.openxmlformats.org/officeDocument/2006/relationships" xmlns:p="http://schemas.openxmlformats.org/presentationml/2006/main">
   <p:cSld>
     <p:spTree>
@@ -3913,7 +3681,7 @@
               <a:pPr>
                 <a:defRPr/>
               </a:pPr>
-              <a:t>9</a:t>
+              <a:t>8</a:t>
             </a:fld>
             <a:endParaRPr lang="en-US" altLang="en-US"/>
           </a:p>
@@ -3923,6 +3691,133 @@
     <p:extLst>
       <p:ext uri="{BB962C8B-B14F-4D97-AF65-F5344CB8AC3E}">
         <p14:creationId xmlns:p14="http://schemas.microsoft.com/office/powerpoint/2010/main" val="1589424273"/>
+      </p:ext>
+    </p:extLst>
+  </p:cSld>
+  <p:clrMapOvr>
+    <a:masterClrMapping/>
+  </p:clrMapOvr>
+</p:notes>
+</file>
+
+<file path=ppt/notesSlides/notesSlide9.xml><?xml version="1.0" encoding="utf-8"?>
+<p:notes xmlns:a="http://schemas.openxmlformats.org/drawingml/2006/main" xmlns:r="http://schemas.openxmlformats.org/officeDocument/2006/relationships" xmlns:p="http://schemas.openxmlformats.org/presentationml/2006/main" showMasterSp="0" showMasterPhAnim="0">
+  <p:cSld>
+    <p:spTree>
+      <p:nvGrpSpPr>
+        <p:cNvPr id="1" name="Shape 61">
+          <a:extLst>
+            <a:ext uri="{FF2B5EF4-FFF2-40B4-BE49-F238E27FC236}">
+              <a16:creationId xmlns:a16="http://schemas.microsoft.com/office/drawing/2014/main" id="{D89AE080-C45E-DF21-44ED-1AB50E218F0E}"/>
+            </a:ext>
+          </a:extLst>
+        </p:cNvPr>
+        <p:cNvGrpSpPr/>
+        <p:nvPr/>
+      </p:nvGrpSpPr>
+      <p:grpSpPr>
+        <a:xfrm>
+          <a:off x="0" y="0"/>
+          <a:ext cx="0" cy="0"/>
+          <a:chOff x="0" y="0"/>
+          <a:chExt cx="0" cy="0"/>
+        </a:xfrm>
+      </p:grpSpPr>
+      <p:sp>
+        <p:nvSpPr>
+          <p:cNvPr id="62" name="Google Shape;62;g37105969b97_1_0:notes">
+            <a:extLst>
+              <a:ext uri="{FF2B5EF4-FFF2-40B4-BE49-F238E27FC236}">
+                <a16:creationId xmlns:a16="http://schemas.microsoft.com/office/drawing/2014/main" id="{2370BDB3-BCB9-99B6-7EA6-1E3BDB0799BE}"/>
+              </a:ext>
+            </a:extLst>
+          </p:cNvPr>
+          <p:cNvSpPr>
+            <a:spLocks noGrp="1" noRot="1" noChangeAspect="1"/>
+          </p:cNvSpPr>
+          <p:nvPr>
+            <p:ph type="sldImg" idx="2"/>
+          </p:nvPr>
+        </p:nvSpPr>
+        <p:spPr>
+          <a:xfrm>
+            <a:off x="381000" y="685800"/>
+            <a:ext cx="6096000" cy="3429000"/>
+          </a:xfrm>
+          <a:custGeom>
+            <a:avLst/>
+            <a:gdLst/>
+            <a:ahLst/>
+            <a:cxnLst/>
+            <a:rect l="l" t="t" r="r" b="b"/>
+            <a:pathLst>
+              <a:path w="120000" h="120000" extrusionOk="0">
+                <a:moveTo>
+                  <a:pt x="0" y="0"/>
+                </a:moveTo>
+                <a:lnTo>
+                  <a:pt x="120000" y="0"/>
+                </a:lnTo>
+                <a:lnTo>
+                  <a:pt x="120000" y="120000"/>
+                </a:lnTo>
+                <a:lnTo>
+                  <a:pt x="0" y="120000"/>
+                </a:lnTo>
+                <a:close/>
+              </a:path>
+            </a:pathLst>
+          </a:custGeom>
+        </p:spPr>
+      </p:sp>
+      <p:sp>
+        <p:nvSpPr>
+          <p:cNvPr id="63" name="Google Shape;63;g37105969b97_1_0:notes">
+            <a:extLst>
+              <a:ext uri="{FF2B5EF4-FFF2-40B4-BE49-F238E27FC236}">
+                <a16:creationId xmlns:a16="http://schemas.microsoft.com/office/drawing/2014/main" id="{AC379ED3-A3BE-FD9E-8436-9DFA42CF74D0}"/>
+              </a:ext>
+            </a:extLst>
+          </p:cNvPr>
+          <p:cNvSpPr txBox="1">
+            <a:spLocks noGrp="1"/>
+          </p:cNvSpPr>
+          <p:nvPr>
+            <p:ph type="body" idx="1"/>
+          </p:nvPr>
+        </p:nvSpPr>
+        <p:spPr>
+          <a:xfrm>
+            <a:off x="685800" y="4343400"/>
+            <a:ext cx="5486400" cy="4114800"/>
+          </a:xfrm>
+          <a:prstGeom prst="rect">
+            <a:avLst/>
+          </a:prstGeom>
+        </p:spPr>
+        <p:txBody>
+          <a:bodyPr spcFirstLastPara="1" wrap="square" lIns="91425" tIns="91425" rIns="91425" bIns="91425" anchor="t" anchorCtr="0">
+            <a:noAutofit/>
+          </a:bodyPr>
+          <a:lstStyle/>
+          <a:p>
+            <a:pPr marL="0" lvl="0" indent="0" algn="l" rtl="0">
+              <a:spcBef>
+                <a:spcPts val="0"/>
+              </a:spcBef>
+              <a:spcAft>
+                <a:spcPts val="0"/>
+              </a:spcAft>
+              <a:buNone/>
+            </a:pPr>
+            <a:endParaRPr dirty="0"/>
+          </a:p>
+        </p:txBody>
+      </p:sp>
+    </p:spTree>
+    <p:extLst>
+      <p:ext uri="{BB962C8B-B14F-4D97-AF65-F5344CB8AC3E}">
+        <p14:creationId xmlns:p14="http://schemas.microsoft.com/office/powerpoint/2010/main" val="3102670015"/>
       </p:ext>
     </p:extLst>
   </p:cSld>
@@ -46369,277 +46264,6 @@
   <p:cSld>
     <p:spTree>
       <p:nvGrpSpPr>
-        <p:cNvPr id="1" name="Shape 64">
-          <a:extLst>
-            <a:ext uri="{FF2B5EF4-FFF2-40B4-BE49-F238E27FC236}">
-              <a16:creationId xmlns:a16="http://schemas.microsoft.com/office/drawing/2014/main" id="{2F35CFA6-B927-4D89-AB7B-DC2C347A9E50}"/>
-            </a:ext>
-          </a:extLst>
-        </p:cNvPr>
-        <p:cNvGrpSpPr/>
-        <p:nvPr/>
-      </p:nvGrpSpPr>
-      <p:grpSpPr>
-        <a:xfrm>
-          <a:off x="0" y="0"/>
-          <a:ext cx="0" cy="0"/>
-          <a:chOff x="0" y="0"/>
-          <a:chExt cx="0" cy="0"/>
-        </a:xfrm>
-      </p:grpSpPr>
-      <p:sp>
-        <p:nvSpPr>
-          <p:cNvPr id="65" name="Google Shape;65;p15">
-            <a:extLst>
-              <a:ext uri="{FF2B5EF4-FFF2-40B4-BE49-F238E27FC236}">
-                <a16:creationId xmlns:a16="http://schemas.microsoft.com/office/drawing/2014/main" id="{AED2004A-1A78-8127-2217-AE41406C2A12}"/>
-              </a:ext>
-            </a:extLst>
-          </p:cNvPr>
-          <p:cNvSpPr txBox="1">
-            <a:spLocks noGrp="1"/>
-          </p:cNvSpPr>
-          <p:nvPr>
-            <p:ph type="body" idx="1"/>
-          </p:nvPr>
-        </p:nvSpPr>
-        <p:spPr>
-          <a:xfrm>
-            <a:off x="311700" y="213675"/>
-            <a:ext cx="8520600" cy="4742700"/>
-          </a:xfrm>
-          <a:prstGeom prst="rect">
-            <a:avLst/>
-          </a:prstGeom>
-        </p:spPr>
-        <p:txBody>
-          <a:bodyPr spcFirstLastPara="1" wrap="square" lIns="91425" tIns="91425" rIns="91425" bIns="91425" anchor="t" anchorCtr="0">
-            <a:normAutofit/>
-          </a:bodyPr>
-          <a:lstStyle/>
-          <a:p>
-            <a:pPr marL="0" lvl="0" indent="0" algn="l" rtl="0">
-              <a:spcBef>
-                <a:spcPts val="0"/>
-              </a:spcBef>
-              <a:spcAft>
-                <a:spcPts val="0"/>
-              </a:spcAft>
-              <a:buNone/>
-            </a:pPr>
-            <a:r>
-              <a:rPr lang="en-US" sz="2500" b="1" dirty="0"/>
-              <a:t>Strings exploration</a:t>
-            </a:r>
-          </a:p>
-          <a:p>
-            <a:pPr marL="0" lvl="0" indent="0" algn="l" rtl="0">
-              <a:spcBef>
-                <a:spcPts val="0"/>
-              </a:spcBef>
-              <a:spcAft>
-                <a:spcPts val="0"/>
-              </a:spcAft>
-              <a:buNone/>
-            </a:pPr>
-            <a:endParaRPr lang="en-US" sz="2500" b="1" dirty="0"/>
-          </a:p>
-          <a:p>
-            <a:pPr marL="0" lvl="0" indent="0" algn="l" rtl="0">
-              <a:spcBef>
-                <a:spcPts val="0"/>
-              </a:spcBef>
-              <a:spcAft>
-                <a:spcPts val="0"/>
-              </a:spcAft>
-              <a:buNone/>
-            </a:pPr>
-            <a:endParaRPr lang="en-US" sz="1800" dirty="0"/>
-          </a:p>
-          <a:p>
-            <a:pPr marL="0" lvl="0" indent="0" algn="l" rtl="0">
-              <a:spcBef>
-                <a:spcPts val="0"/>
-              </a:spcBef>
-              <a:spcAft>
-                <a:spcPts val="0"/>
-              </a:spcAft>
-              <a:buNone/>
-            </a:pPr>
-            <a:endParaRPr lang="en-US" sz="1800" dirty="0"/>
-          </a:p>
-        </p:txBody>
-      </p:sp>
-      <p:sp>
-        <p:nvSpPr>
-          <p:cNvPr id="3" name="TextBox 2">
-            <a:extLst>
-              <a:ext uri="{FF2B5EF4-FFF2-40B4-BE49-F238E27FC236}">
-                <a16:creationId xmlns:a16="http://schemas.microsoft.com/office/drawing/2014/main" id="{042974E2-420F-A192-9719-7A2D27114A93}"/>
-              </a:ext>
-            </a:extLst>
-          </p:cNvPr>
-          <p:cNvSpPr txBox="1"/>
-          <p:nvPr/>
-        </p:nvSpPr>
-        <p:spPr>
-          <a:xfrm>
-            <a:off x="311699" y="935287"/>
-            <a:ext cx="7248827" cy="3693319"/>
-          </a:xfrm>
-          <a:prstGeom prst="rect">
-            <a:avLst/>
-          </a:prstGeom>
-          <a:noFill/>
-        </p:spPr>
-        <p:txBody>
-          <a:bodyPr wrap="square">
-            <a:spAutoFit/>
-          </a:bodyPr>
-          <a:lstStyle/>
-          <a:p>
-            <a:r>
-              <a:rPr lang="en-US" sz="1600" b="1" dirty="0"/>
-              <a:t>In your interactive terminal create the following variables and answer the following questions:</a:t>
-            </a:r>
-          </a:p>
-          <a:p>
-            <a:endParaRPr lang="en-US" sz="1600" b="1" dirty="0"/>
-          </a:p>
-          <a:p>
-            <a:r>
-              <a:rPr lang="en-US" sz="1600" dirty="0" err="1"/>
-              <a:t>my_list</a:t>
-            </a:r>
-            <a:r>
-              <a:rPr lang="en-US" sz="1600" dirty="0"/>
-              <a:t> = ['c', 'a', 't']</a:t>
-            </a:r>
-          </a:p>
-          <a:p>
-            <a:r>
-              <a:rPr lang="en-US" sz="1600" dirty="0" err="1"/>
-              <a:t>my_string</a:t>
-            </a:r>
-            <a:r>
-              <a:rPr lang="en-US" sz="1600" dirty="0"/>
-              <a:t> = "cat“</a:t>
-            </a:r>
-          </a:p>
-          <a:p>
-            <a:endParaRPr lang="en-US" dirty="0"/>
-          </a:p>
-          <a:p>
-            <a:endParaRPr lang="en-US" dirty="0"/>
-          </a:p>
-          <a:p>
-            <a:pPr marL="342900" indent="-342900">
-              <a:buAutoNum type="arabicParenR"/>
-            </a:pPr>
-            <a:r>
-              <a:rPr lang="en-US" dirty="0"/>
-              <a:t>Can you loop through both variables?</a:t>
-            </a:r>
-          </a:p>
-          <a:p>
-            <a:pPr marL="342900" indent="-342900">
-              <a:buAutoNum type="arabicParenR"/>
-            </a:pPr>
-            <a:endParaRPr lang="en-US" dirty="0"/>
-          </a:p>
-          <a:p>
-            <a:pPr marL="342900" indent="-342900">
-              <a:buAutoNum type="arabicParenR"/>
-            </a:pPr>
-            <a:r>
-              <a:rPr lang="en-US" dirty="0"/>
-              <a:t>Can you index and slice both variables?</a:t>
-            </a:r>
-          </a:p>
-          <a:p>
-            <a:pPr marL="342900" indent="-342900">
-              <a:buAutoNum type="arabicParenR"/>
-            </a:pPr>
-            <a:endParaRPr lang="en-US" dirty="0"/>
-          </a:p>
-          <a:p>
-            <a:pPr marL="342900" indent="-342900">
-              <a:buAutoNum type="arabicParenR"/>
-            </a:pPr>
-            <a:r>
-              <a:rPr lang="en-US" dirty="0"/>
-              <a:t>Can you use the </a:t>
-            </a:r>
-            <a:r>
-              <a:rPr lang="en-US" dirty="0" err="1"/>
-              <a:t>len</a:t>
-            </a:r>
-            <a:r>
-              <a:rPr lang="en-US" dirty="0"/>
-              <a:t>() function on both variables?</a:t>
-            </a:r>
-          </a:p>
-          <a:p>
-            <a:pPr marL="342900" indent="-342900">
-              <a:buAutoNum type="arabicParenR"/>
-            </a:pPr>
-            <a:endParaRPr lang="en-US" dirty="0"/>
-          </a:p>
-          <a:p>
-            <a:pPr marL="342900" indent="-342900">
-              <a:buAutoNum type="arabicParenR"/>
-            </a:pPr>
-            <a:r>
-              <a:rPr lang="en-US" dirty="0"/>
-              <a:t>Can you check for membership the same way for both variables?</a:t>
-            </a:r>
-            <a:br>
-              <a:rPr lang="en-US" dirty="0"/>
-            </a:br>
-            <a:r>
-              <a:rPr lang="en-US" dirty="0"/>
-              <a:t>	print('a' in </a:t>
-            </a:r>
-            <a:r>
-              <a:rPr lang="en-US" dirty="0" err="1"/>
-              <a:t>my_list</a:t>
-            </a:r>
-            <a:r>
-              <a:rPr lang="en-US" dirty="0"/>
-              <a:t>, 'a' in </a:t>
-            </a:r>
-            <a:r>
-              <a:rPr lang="en-US" dirty="0" err="1"/>
-              <a:t>my_string</a:t>
-            </a:r>
-            <a:r>
-              <a:rPr lang="en-US" dirty="0"/>
-              <a:t>)</a:t>
-            </a:r>
-          </a:p>
-          <a:p>
-            <a:endParaRPr lang="en-US" sz="1400" dirty="0"/>
-          </a:p>
-        </p:txBody>
-      </p:sp>
-    </p:spTree>
-    <p:extLst>
-      <p:ext uri="{BB962C8B-B14F-4D97-AF65-F5344CB8AC3E}">
-        <p14:creationId xmlns:p14="http://schemas.microsoft.com/office/powerpoint/2010/main" val="891458789"/>
-      </p:ext>
-    </p:extLst>
-  </p:cSld>
-  <p:clrMapOvr>
-    <a:masterClrMapping/>
-  </p:clrMapOvr>
-</p:sld>
-</file>
-
-<file path=ppt/slides/slide11.xml><?xml version="1.0" encoding="utf-8"?>
-<p:sld xmlns:a="http://schemas.openxmlformats.org/drawingml/2006/main" xmlns:r="http://schemas.openxmlformats.org/officeDocument/2006/relationships" xmlns:p="http://schemas.openxmlformats.org/presentationml/2006/main">
-  <p:cSld>
-    <p:spTree>
-      <p:nvGrpSpPr>
         <p:cNvPr id="1" name="">
           <a:extLst>
             <a:ext uri="{FF2B5EF4-FFF2-40B4-BE49-F238E27FC236}">
@@ -46682,7 +46306,7 @@
             <a:fld id="{71B8893A-F325-44A6-8EFB-883C20332CFE}" type="slidenum">
               <a:rPr lang="en-US" smtClean="0"/>
               <a:pPr/>
-              <a:t>11</a:t>
+              <a:t>10</a:t>
             </a:fld>
             <a:endParaRPr lang="en-US"/>
           </a:p>
@@ -47053,7 +46677,7 @@
 </p:sld>
 </file>
 
-<file path=ppt/slides/slide12.xml><?xml version="1.0" encoding="utf-8"?>
+<file path=ppt/slides/slide11.xml><?xml version="1.0" encoding="utf-8"?>
 <p:sld xmlns:a="http://schemas.openxmlformats.org/drawingml/2006/main" xmlns:r="http://schemas.openxmlformats.org/officeDocument/2006/relationships" xmlns:p="http://schemas.openxmlformats.org/presentationml/2006/main">
   <p:cSld>
     <p:spTree>
@@ -47100,7 +46724,7 @@
             <a:fld id="{71B8893A-F325-44A6-8EFB-883C20332CFE}" type="slidenum">
               <a:rPr lang="en-US" smtClean="0"/>
               <a:pPr/>
-              <a:t>12</a:t>
+              <a:t>11</a:t>
             </a:fld>
             <a:endParaRPr lang="en-US"/>
           </a:p>
@@ -49272,7 +48896,7 @@
 </p:sld>
 </file>
 
-<file path=ppt/slides/slide13.xml><?xml version="1.0" encoding="utf-8"?>
+<file path=ppt/slides/slide12.xml><?xml version="1.0" encoding="utf-8"?>
 <p:sld xmlns:a="http://schemas.openxmlformats.org/drawingml/2006/main" xmlns:r="http://schemas.openxmlformats.org/officeDocument/2006/relationships" xmlns:p="http://schemas.openxmlformats.org/presentationml/2006/main">
   <p:cSld>
     <p:spTree>
@@ -49319,7 +48943,7 @@
             <a:fld id="{71B8893A-F325-44A6-8EFB-883C20332CFE}" type="slidenum">
               <a:rPr lang="en-US" smtClean="0"/>
               <a:pPr/>
-              <a:t>13</a:t>
+              <a:t>12</a:t>
             </a:fld>
             <a:endParaRPr lang="en-US"/>
           </a:p>
@@ -51131,12 +50755,12 @@
                         <a:buNone/>
                       </a:pPr>
                       <a:r>
-                        <a:rPr lang="en-US" sz="1400">
+                        <a:rPr lang="en-US" sz="1400" dirty="0">
                           <a:latin typeface="Courier New" panose="02070309020205020404" pitchFamily="49" charset="0"/>
                         </a:rPr>
                         <a:t>"abc123".isalnum()</a:t>
                       </a:r>
-                      <a:endParaRPr lang="en-US" sz="1400"/>
+                      <a:endParaRPr lang="en-US" sz="1400" dirty="0"/>
                     </a:p>
                   </a:txBody>
                   <a:tcPr marL="30525" marR="30525" marT="15263" marB="15263" anchor="ctr">
@@ -51363,12 +50987,24 @@
                         <a:buNone/>
                       </a:pPr>
                       <a:r>
-                        <a:rPr lang="en-US" sz="1400">
+                        <a:rPr lang="en-US" sz="1400" dirty="0">
                           <a:latin typeface="Courier New" panose="02070309020205020404" pitchFamily="49" charset="0"/>
                         </a:rPr>
-                        <a:t>" ".isspace()</a:t>
+                        <a:t>" ".</a:t>
                       </a:r>
-                      <a:endParaRPr lang="en-US" sz="1400"/>
+                      <a:r>
+                        <a:rPr lang="en-US" sz="1400" dirty="0" err="1">
+                          <a:latin typeface="Courier New" panose="02070309020205020404" pitchFamily="49" charset="0"/>
+                        </a:rPr>
+                        <a:t>isspace</a:t>
+                      </a:r>
+                      <a:r>
+                        <a:rPr lang="en-US" sz="1400" dirty="0">
+                          <a:latin typeface="Courier New" panose="02070309020205020404" pitchFamily="49" charset="0"/>
+                        </a:rPr>
+                        <a:t>()</a:t>
+                      </a:r>
+                      <a:endParaRPr lang="en-US" sz="1400" dirty="0"/>
                     </a:p>
                   </a:txBody>
                   <a:tcPr marL="30525" marR="30525" marT="15263" marB="15263" anchor="ctr">
@@ -51977,7 +51613,7 @@
 </p:sld>
 </file>
 
-<file path=ppt/slides/slide14.xml><?xml version="1.0" encoding="utf-8"?>
+<file path=ppt/slides/slide13.xml><?xml version="1.0" encoding="utf-8"?>
 <p:sld xmlns:a="http://schemas.openxmlformats.org/drawingml/2006/main" xmlns:r="http://schemas.openxmlformats.org/officeDocument/2006/relationships" xmlns:p="http://schemas.openxmlformats.org/presentationml/2006/main">
   <p:cSld>
     <p:spTree>
@@ -52347,7 +51983,7 @@
 </p:sld>
 </file>
 
-<file path=ppt/slides/slide15.xml><?xml version="1.0" encoding="utf-8"?>
+<file path=ppt/slides/slide14.xml><?xml version="1.0" encoding="utf-8"?>
 <p:sld xmlns:a="http://schemas.openxmlformats.org/drawingml/2006/main" xmlns:r="http://schemas.openxmlformats.org/officeDocument/2006/relationships" xmlns:p="http://schemas.openxmlformats.org/presentationml/2006/main">
   <p:cSld>
     <p:spTree>
@@ -52597,7 +52233,7 @@
 </p:sld>
 </file>
 
-<file path=ppt/slides/slide16.xml><?xml version="1.0" encoding="utf-8"?>
+<file path=ppt/slides/slide15.xml><?xml version="1.0" encoding="utf-8"?>
 <p:sld xmlns:a="http://schemas.openxmlformats.org/drawingml/2006/main" xmlns:r="http://schemas.openxmlformats.org/officeDocument/2006/relationships" xmlns:p="http://schemas.openxmlformats.org/presentationml/2006/main">
   <p:cSld>
     <p:spTree>
@@ -52666,7 +52302,7 @@
 </p:sld>
 </file>
 
-<file path=ppt/slides/slide17.xml><?xml version="1.0" encoding="utf-8"?>
+<file path=ppt/slides/slide16.xml><?xml version="1.0" encoding="utf-8"?>
 <p:sld xmlns:a="http://schemas.openxmlformats.org/drawingml/2006/main" xmlns:r="http://schemas.openxmlformats.org/officeDocument/2006/relationships" xmlns:p="http://schemas.openxmlformats.org/presentationml/2006/main">
   <p:cSld>
     <p:spTree>
@@ -52713,7 +52349,7 @@
             <a:fld id="{71B8893A-F325-44A6-8EFB-883C20332CFE}" type="slidenum">
               <a:rPr lang="en-US" smtClean="0"/>
               <a:pPr/>
-              <a:t>17</a:t>
+              <a:t>16</a:t>
             </a:fld>
             <a:endParaRPr lang="en-US"/>
           </a:p>
@@ -53042,7 +52678,7 @@
 </p:sld>
 </file>
 
-<file path=ppt/slides/slide18.xml><?xml version="1.0" encoding="utf-8"?>
+<file path=ppt/slides/slide17.xml><?xml version="1.0" encoding="utf-8"?>
 <p:sld xmlns:a="http://schemas.openxmlformats.org/drawingml/2006/main" xmlns:r="http://schemas.openxmlformats.org/officeDocument/2006/relationships" xmlns:p="http://schemas.openxmlformats.org/presentationml/2006/main">
   <p:cSld>
     <p:spTree>
@@ -53083,7 +52719,7 @@
             <a:fld id="{71B8893A-F325-44A6-8EFB-883C20332CFE}" type="slidenum">
               <a:rPr lang="en-US" smtClean="0"/>
               <a:pPr/>
-              <a:t>18</a:t>
+              <a:t>17</a:t>
             </a:fld>
             <a:endParaRPr lang="en-US"/>
           </a:p>
@@ -53510,7 +53146,7 @@
 </p:sld>
 </file>
 
-<file path=ppt/slides/slide19.xml><?xml version="1.0" encoding="utf-8"?>
+<file path=ppt/slides/slide18.xml><?xml version="1.0" encoding="utf-8"?>
 <p:sld xmlns:a="http://schemas.openxmlformats.org/drawingml/2006/main" xmlns:r="http://schemas.openxmlformats.org/officeDocument/2006/relationships" xmlns:p="http://schemas.openxmlformats.org/presentationml/2006/main">
   <p:cSld>
     <p:spTree>
@@ -53579,258 +53215,7 @@
 </p:sld>
 </file>
 
-<file path=ppt/slides/slide2.xml><?xml version="1.0" encoding="utf-8"?>
-<p:sld xmlns:a="http://schemas.openxmlformats.org/drawingml/2006/main" xmlns:r="http://schemas.openxmlformats.org/officeDocument/2006/relationships" xmlns:p="http://schemas.openxmlformats.org/presentationml/2006/main">
-  <p:cSld>
-    <p:spTree>
-      <p:nvGrpSpPr>
-        <p:cNvPr id="1" name="">
-          <a:extLst>
-            <a:ext uri="{FF2B5EF4-FFF2-40B4-BE49-F238E27FC236}">
-              <a16:creationId xmlns:a16="http://schemas.microsoft.com/office/drawing/2014/main" id="{BA0730DC-F6C8-22C9-2A12-713C4E1E458B}"/>
-            </a:ext>
-          </a:extLst>
-        </p:cNvPr>
-        <p:cNvGrpSpPr/>
-        <p:nvPr/>
-      </p:nvGrpSpPr>
-      <p:grpSpPr>
-        <a:xfrm>
-          <a:off x="0" y="0"/>
-          <a:ext cx="0" cy="0"/>
-          <a:chOff x="0" y="0"/>
-          <a:chExt cx="0" cy="0"/>
-        </a:xfrm>
-      </p:grpSpPr>
-      <p:sp>
-        <p:nvSpPr>
-          <p:cNvPr id="2" name="Title 1">
-            <a:extLst>
-              <a:ext uri="{FF2B5EF4-FFF2-40B4-BE49-F238E27FC236}">
-                <a16:creationId xmlns:a16="http://schemas.microsoft.com/office/drawing/2014/main" id="{44193AAA-D656-4F94-34E8-AB59565878B7}"/>
-              </a:ext>
-            </a:extLst>
-          </p:cNvPr>
-          <p:cNvSpPr>
-            <a:spLocks noGrp="1"/>
-          </p:cNvSpPr>
-          <p:nvPr>
-            <p:ph type="title"/>
-          </p:nvPr>
-        </p:nvSpPr>
-        <p:spPr/>
-        <p:txBody>
-          <a:bodyPr/>
-          <a:lstStyle/>
-          <a:p>
-            <a:br>
-              <a:rPr lang="en-US" dirty="0"/>
-            </a:br>
-            <a:r>
-              <a:rPr lang="en-US" dirty="0"/>
-              <a:t>Before we start….</a:t>
-            </a:r>
-          </a:p>
-        </p:txBody>
-      </p:sp>
-      <p:sp>
-        <p:nvSpPr>
-          <p:cNvPr id="5" name="TextBox 4">
-            <a:extLst>
-              <a:ext uri="{FF2B5EF4-FFF2-40B4-BE49-F238E27FC236}">
-                <a16:creationId xmlns:a16="http://schemas.microsoft.com/office/drawing/2014/main" id="{8B514417-23DA-C546-6700-FBE2B4651B4A}"/>
-              </a:ext>
-            </a:extLst>
-          </p:cNvPr>
-          <p:cNvSpPr txBox="1"/>
-          <p:nvPr/>
-        </p:nvSpPr>
-        <p:spPr>
-          <a:xfrm>
-            <a:off x="1170878" y="1091086"/>
-            <a:ext cx="6477000" cy="1938992"/>
-          </a:xfrm>
-          <a:prstGeom prst="rect">
-            <a:avLst/>
-          </a:prstGeom>
-          <a:noFill/>
-        </p:spPr>
-        <p:txBody>
-          <a:bodyPr wrap="square">
-            <a:spAutoFit/>
-          </a:bodyPr>
-          <a:lstStyle/>
-          <a:p>
-            <a:pPr marL="342900" indent="-342900">
-              <a:buFont typeface="Arial" panose="020B0604020202020204" pitchFamily="34" charset="0"/>
-              <a:buChar char="•"/>
-            </a:pPr>
-            <a:r>
-              <a:rPr lang="en-US" sz="2000" dirty="0"/>
-              <a:t>Let’s run through our git sequence so you can get my changes, and then create a Lesson4 notes for yourself…</a:t>
-            </a:r>
-          </a:p>
-          <a:p>
-            <a:pPr marL="342900" indent="-342900">
-              <a:buFont typeface="Arial" panose="020B0604020202020204" pitchFamily="34" charset="0"/>
-              <a:buChar char="•"/>
-            </a:pPr>
-            <a:endParaRPr lang="en-US" sz="2000" dirty="0"/>
-          </a:p>
-          <a:p>
-            <a:pPr marL="342900" indent="-342900">
-              <a:buFont typeface="Arial" panose="020B0604020202020204" pitchFamily="34" charset="0"/>
-              <a:buChar char="•"/>
-            </a:pPr>
-            <a:r>
-              <a:rPr lang="en-US" sz="2000" dirty="0"/>
-              <a:t>Let’s practice creating our own Git repository… the easy way!</a:t>
-            </a:r>
-          </a:p>
-        </p:txBody>
-      </p:sp>
-    </p:spTree>
-    <p:extLst>
-      <p:ext uri="{BB962C8B-B14F-4D97-AF65-F5344CB8AC3E}">
-        <p14:creationId xmlns:p14="http://schemas.microsoft.com/office/powerpoint/2010/main" val="2603382457"/>
-      </p:ext>
-    </p:extLst>
-  </p:cSld>
-  <p:clrMapOvr>
-    <a:masterClrMapping/>
-  </p:clrMapOvr>
-  <p:timing>
-    <p:tnLst>
-      <p:par>
-        <p:cTn id="1" dur="indefinite" restart="never" nodeType="tmRoot">
-          <p:childTnLst>
-            <p:seq concurrent="1" nextAc="seek">
-              <p:cTn id="2" dur="indefinite" nodeType="mainSeq">
-                <p:childTnLst>
-                  <p:par>
-                    <p:cTn id="3" fill="hold">
-                      <p:stCondLst>
-                        <p:cond delay="indefinite"/>
-                      </p:stCondLst>
-                      <p:childTnLst>
-                        <p:par>
-                          <p:cTn id="4" fill="hold">
-                            <p:stCondLst>
-                              <p:cond delay="0"/>
-                            </p:stCondLst>
-                            <p:childTnLst>
-                              <p:par>
-                                <p:cTn id="5" presetID="1" presetClass="entr" presetSubtype="0" fill="hold" nodeType="clickEffect">
-                                  <p:stCondLst>
-                                    <p:cond delay="0"/>
-                                  </p:stCondLst>
-                                  <p:childTnLst>
-                                    <p:set>
-                                      <p:cBhvr>
-                                        <p:cTn id="6" dur="1" fill="hold">
-                                          <p:stCondLst>
-                                            <p:cond delay="0"/>
-                                          </p:stCondLst>
-                                        </p:cTn>
-                                        <p:tgtEl>
-                                          <p:spTgt spid="5">
-                                            <p:txEl>
-                                              <p:pRg st="0" end="0"/>
-                                            </p:txEl>
-                                          </p:spTgt>
-                                        </p:tgtEl>
-                                        <p:attrNameLst>
-                                          <p:attrName>style.visibility</p:attrName>
-                                        </p:attrNameLst>
-                                      </p:cBhvr>
-                                      <p:to>
-                                        <p:strVal val="visible"/>
-                                      </p:to>
-                                    </p:set>
-                                  </p:childTnLst>
-                                </p:cTn>
-                              </p:par>
-                            </p:childTnLst>
-                          </p:cTn>
-                        </p:par>
-                      </p:childTnLst>
-                    </p:cTn>
-                  </p:par>
-                  <p:par>
-                    <p:cTn id="7" fill="hold">
-                      <p:stCondLst>
-                        <p:cond delay="indefinite"/>
-                      </p:stCondLst>
-                      <p:childTnLst>
-                        <p:par>
-                          <p:cTn id="8" fill="hold">
-                            <p:stCondLst>
-                              <p:cond delay="0"/>
-                            </p:stCondLst>
-                            <p:childTnLst>
-                              <p:par>
-                                <p:cTn id="9" presetID="1" presetClass="entr" presetSubtype="0" fill="hold" nodeType="clickEffect">
-                                  <p:stCondLst>
-                                    <p:cond delay="0"/>
-                                  </p:stCondLst>
-                                  <p:childTnLst>
-                                    <p:set>
-                                      <p:cBhvr>
-                                        <p:cTn id="10" dur="1" fill="hold">
-                                          <p:stCondLst>
-                                            <p:cond delay="0"/>
-                                          </p:stCondLst>
-                                        </p:cTn>
-                                        <p:tgtEl>
-                                          <p:spTgt spid="5">
-                                            <p:txEl>
-                                              <p:pRg st="2" end="2"/>
-                                            </p:txEl>
-                                          </p:spTgt>
-                                        </p:tgtEl>
-                                        <p:attrNameLst>
-                                          <p:attrName>style.visibility</p:attrName>
-                                        </p:attrNameLst>
-                                      </p:cBhvr>
-                                      <p:to>
-                                        <p:strVal val="visible"/>
-                                      </p:to>
-                                    </p:set>
-                                  </p:childTnLst>
-                                </p:cTn>
-                              </p:par>
-                            </p:childTnLst>
-                          </p:cTn>
-                        </p:par>
-                      </p:childTnLst>
-                    </p:cTn>
-                  </p:par>
-                </p:childTnLst>
-              </p:cTn>
-              <p:prevCondLst>
-                <p:cond evt="onPrev" delay="0">
-                  <p:tgtEl>
-                    <p:sldTgt/>
-                  </p:tgtEl>
-                </p:cond>
-              </p:prevCondLst>
-              <p:nextCondLst>
-                <p:cond evt="onNext" delay="0">
-                  <p:tgtEl>
-                    <p:sldTgt/>
-                  </p:tgtEl>
-                </p:cond>
-              </p:nextCondLst>
-            </p:seq>
-          </p:childTnLst>
-        </p:cTn>
-      </p:par>
-    </p:tnLst>
-  </p:timing>
-</p:sld>
-</file>
-
-<file path=ppt/slides/slide20.xml><?xml version="1.0" encoding="utf-8"?>
+<file path=ppt/slides/slide19.xml><?xml version="1.0" encoding="utf-8"?>
 <p:sld xmlns:a="http://schemas.openxmlformats.org/drawingml/2006/main" xmlns:r="http://schemas.openxmlformats.org/officeDocument/2006/relationships" xmlns:p="http://schemas.openxmlformats.org/presentationml/2006/main">
   <p:cSld>
     <p:spTree>
@@ -53877,7 +53262,7 @@
             <a:fld id="{71B8893A-F325-44A6-8EFB-883C20332CFE}" type="slidenum">
               <a:rPr lang="en-US" smtClean="0"/>
               <a:pPr/>
-              <a:t>20</a:t>
+              <a:t>19</a:t>
             </a:fld>
             <a:endParaRPr lang="en-US"/>
           </a:p>
@@ -54513,7 +53898,258 @@
 </p:sld>
 </file>
 
-<file path=ppt/slides/slide21.xml><?xml version="1.0" encoding="utf-8"?>
+<file path=ppt/slides/slide2.xml><?xml version="1.0" encoding="utf-8"?>
+<p:sld xmlns:a="http://schemas.openxmlformats.org/drawingml/2006/main" xmlns:r="http://schemas.openxmlformats.org/officeDocument/2006/relationships" xmlns:p="http://schemas.openxmlformats.org/presentationml/2006/main">
+  <p:cSld>
+    <p:spTree>
+      <p:nvGrpSpPr>
+        <p:cNvPr id="1" name="">
+          <a:extLst>
+            <a:ext uri="{FF2B5EF4-FFF2-40B4-BE49-F238E27FC236}">
+              <a16:creationId xmlns:a16="http://schemas.microsoft.com/office/drawing/2014/main" id="{BA0730DC-F6C8-22C9-2A12-713C4E1E458B}"/>
+            </a:ext>
+          </a:extLst>
+        </p:cNvPr>
+        <p:cNvGrpSpPr/>
+        <p:nvPr/>
+      </p:nvGrpSpPr>
+      <p:grpSpPr>
+        <a:xfrm>
+          <a:off x="0" y="0"/>
+          <a:ext cx="0" cy="0"/>
+          <a:chOff x="0" y="0"/>
+          <a:chExt cx="0" cy="0"/>
+        </a:xfrm>
+      </p:grpSpPr>
+      <p:sp>
+        <p:nvSpPr>
+          <p:cNvPr id="2" name="Title 1">
+            <a:extLst>
+              <a:ext uri="{FF2B5EF4-FFF2-40B4-BE49-F238E27FC236}">
+                <a16:creationId xmlns:a16="http://schemas.microsoft.com/office/drawing/2014/main" id="{44193AAA-D656-4F94-34E8-AB59565878B7}"/>
+              </a:ext>
+            </a:extLst>
+          </p:cNvPr>
+          <p:cNvSpPr>
+            <a:spLocks noGrp="1"/>
+          </p:cNvSpPr>
+          <p:nvPr>
+            <p:ph type="title"/>
+          </p:nvPr>
+        </p:nvSpPr>
+        <p:spPr/>
+        <p:txBody>
+          <a:bodyPr/>
+          <a:lstStyle/>
+          <a:p>
+            <a:br>
+              <a:rPr lang="en-US" dirty="0"/>
+            </a:br>
+            <a:r>
+              <a:rPr lang="en-US" dirty="0"/>
+              <a:t>Before we start….</a:t>
+            </a:r>
+          </a:p>
+        </p:txBody>
+      </p:sp>
+      <p:sp>
+        <p:nvSpPr>
+          <p:cNvPr id="5" name="TextBox 4">
+            <a:extLst>
+              <a:ext uri="{FF2B5EF4-FFF2-40B4-BE49-F238E27FC236}">
+                <a16:creationId xmlns:a16="http://schemas.microsoft.com/office/drawing/2014/main" id="{8B514417-23DA-C546-6700-FBE2B4651B4A}"/>
+              </a:ext>
+            </a:extLst>
+          </p:cNvPr>
+          <p:cNvSpPr txBox="1"/>
+          <p:nvPr/>
+        </p:nvSpPr>
+        <p:spPr>
+          <a:xfrm>
+            <a:off x="1170878" y="1091086"/>
+            <a:ext cx="6477000" cy="1938992"/>
+          </a:xfrm>
+          <a:prstGeom prst="rect">
+            <a:avLst/>
+          </a:prstGeom>
+          <a:noFill/>
+        </p:spPr>
+        <p:txBody>
+          <a:bodyPr wrap="square">
+            <a:spAutoFit/>
+          </a:bodyPr>
+          <a:lstStyle/>
+          <a:p>
+            <a:pPr marL="342900" indent="-342900">
+              <a:buFont typeface="Arial" panose="020B0604020202020204" pitchFamily="34" charset="0"/>
+              <a:buChar char="•"/>
+            </a:pPr>
+            <a:r>
+              <a:rPr lang="en-US" sz="2000" dirty="0"/>
+              <a:t>Let’s run through our git sequence so you can get my changes, and then create a Lesson4 notes for yourself…</a:t>
+            </a:r>
+          </a:p>
+          <a:p>
+            <a:pPr marL="342900" indent="-342900">
+              <a:buFont typeface="Arial" panose="020B0604020202020204" pitchFamily="34" charset="0"/>
+              <a:buChar char="•"/>
+            </a:pPr>
+            <a:endParaRPr lang="en-US" sz="2000" dirty="0"/>
+          </a:p>
+          <a:p>
+            <a:pPr marL="342900" indent="-342900">
+              <a:buFont typeface="Arial" panose="020B0604020202020204" pitchFamily="34" charset="0"/>
+              <a:buChar char="•"/>
+            </a:pPr>
+            <a:r>
+              <a:rPr lang="en-US" sz="2000" dirty="0"/>
+              <a:t>Let’s practice creating our own Git repository… the easy way!</a:t>
+            </a:r>
+          </a:p>
+        </p:txBody>
+      </p:sp>
+    </p:spTree>
+    <p:extLst>
+      <p:ext uri="{BB962C8B-B14F-4D97-AF65-F5344CB8AC3E}">
+        <p14:creationId xmlns:p14="http://schemas.microsoft.com/office/powerpoint/2010/main" val="2603382457"/>
+      </p:ext>
+    </p:extLst>
+  </p:cSld>
+  <p:clrMapOvr>
+    <a:masterClrMapping/>
+  </p:clrMapOvr>
+  <p:timing>
+    <p:tnLst>
+      <p:par>
+        <p:cTn id="1" dur="indefinite" restart="never" nodeType="tmRoot">
+          <p:childTnLst>
+            <p:seq concurrent="1" nextAc="seek">
+              <p:cTn id="2" dur="indefinite" nodeType="mainSeq">
+                <p:childTnLst>
+                  <p:par>
+                    <p:cTn id="3" fill="hold">
+                      <p:stCondLst>
+                        <p:cond delay="indefinite"/>
+                      </p:stCondLst>
+                      <p:childTnLst>
+                        <p:par>
+                          <p:cTn id="4" fill="hold">
+                            <p:stCondLst>
+                              <p:cond delay="0"/>
+                            </p:stCondLst>
+                            <p:childTnLst>
+                              <p:par>
+                                <p:cTn id="5" presetID="1" presetClass="entr" presetSubtype="0" fill="hold" nodeType="clickEffect">
+                                  <p:stCondLst>
+                                    <p:cond delay="0"/>
+                                  </p:stCondLst>
+                                  <p:childTnLst>
+                                    <p:set>
+                                      <p:cBhvr>
+                                        <p:cTn id="6" dur="1" fill="hold">
+                                          <p:stCondLst>
+                                            <p:cond delay="0"/>
+                                          </p:stCondLst>
+                                        </p:cTn>
+                                        <p:tgtEl>
+                                          <p:spTgt spid="5">
+                                            <p:txEl>
+                                              <p:pRg st="0" end="0"/>
+                                            </p:txEl>
+                                          </p:spTgt>
+                                        </p:tgtEl>
+                                        <p:attrNameLst>
+                                          <p:attrName>style.visibility</p:attrName>
+                                        </p:attrNameLst>
+                                      </p:cBhvr>
+                                      <p:to>
+                                        <p:strVal val="visible"/>
+                                      </p:to>
+                                    </p:set>
+                                  </p:childTnLst>
+                                </p:cTn>
+                              </p:par>
+                            </p:childTnLst>
+                          </p:cTn>
+                        </p:par>
+                      </p:childTnLst>
+                    </p:cTn>
+                  </p:par>
+                  <p:par>
+                    <p:cTn id="7" fill="hold">
+                      <p:stCondLst>
+                        <p:cond delay="indefinite"/>
+                      </p:stCondLst>
+                      <p:childTnLst>
+                        <p:par>
+                          <p:cTn id="8" fill="hold">
+                            <p:stCondLst>
+                              <p:cond delay="0"/>
+                            </p:stCondLst>
+                            <p:childTnLst>
+                              <p:par>
+                                <p:cTn id="9" presetID="1" presetClass="entr" presetSubtype="0" fill="hold" nodeType="clickEffect">
+                                  <p:stCondLst>
+                                    <p:cond delay="0"/>
+                                  </p:stCondLst>
+                                  <p:childTnLst>
+                                    <p:set>
+                                      <p:cBhvr>
+                                        <p:cTn id="10" dur="1" fill="hold">
+                                          <p:stCondLst>
+                                            <p:cond delay="0"/>
+                                          </p:stCondLst>
+                                        </p:cTn>
+                                        <p:tgtEl>
+                                          <p:spTgt spid="5">
+                                            <p:txEl>
+                                              <p:pRg st="2" end="2"/>
+                                            </p:txEl>
+                                          </p:spTgt>
+                                        </p:tgtEl>
+                                        <p:attrNameLst>
+                                          <p:attrName>style.visibility</p:attrName>
+                                        </p:attrNameLst>
+                                      </p:cBhvr>
+                                      <p:to>
+                                        <p:strVal val="visible"/>
+                                      </p:to>
+                                    </p:set>
+                                  </p:childTnLst>
+                                </p:cTn>
+                              </p:par>
+                            </p:childTnLst>
+                          </p:cTn>
+                        </p:par>
+                      </p:childTnLst>
+                    </p:cTn>
+                  </p:par>
+                </p:childTnLst>
+              </p:cTn>
+              <p:prevCondLst>
+                <p:cond evt="onPrev" delay="0">
+                  <p:tgtEl>
+                    <p:sldTgt/>
+                  </p:tgtEl>
+                </p:cond>
+              </p:prevCondLst>
+              <p:nextCondLst>
+                <p:cond evt="onNext" delay="0">
+                  <p:tgtEl>
+                    <p:sldTgt/>
+                  </p:tgtEl>
+                </p:cond>
+              </p:nextCondLst>
+            </p:seq>
+          </p:childTnLst>
+        </p:cTn>
+      </p:par>
+    </p:tnLst>
+  </p:timing>
+</p:sld>
+</file>
+
+<file path=ppt/slides/slide20.xml><?xml version="1.0" encoding="utf-8"?>
 <p:sld xmlns:a="http://schemas.openxmlformats.org/drawingml/2006/main" xmlns:r="http://schemas.openxmlformats.org/officeDocument/2006/relationships" xmlns:p="http://schemas.openxmlformats.org/presentationml/2006/main">
   <p:cSld>
     <p:spTree>
@@ -54560,7 +54196,7 @@
             <a:fld id="{71B8893A-F325-44A6-8EFB-883C20332CFE}" type="slidenum">
               <a:rPr lang="en-US" smtClean="0"/>
               <a:pPr/>
-              <a:t>21</a:t>
+              <a:t>20</a:t>
             </a:fld>
             <a:endParaRPr lang="en-US"/>
           </a:p>
@@ -55191,7 +54827,7 @@
 </p:sld>
 </file>
 
-<file path=ppt/slides/slide22.xml><?xml version="1.0" encoding="utf-8"?>
+<file path=ppt/slides/slide21.xml><?xml version="1.0" encoding="utf-8"?>
 <p:sld xmlns:a="http://schemas.openxmlformats.org/drawingml/2006/main" xmlns:r="http://schemas.openxmlformats.org/officeDocument/2006/relationships" xmlns:p="http://schemas.openxmlformats.org/presentationml/2006/main">
   <p:cSld>
     <p:spTree>
@@ -55238,7 +54874,7 @@
             <a:fld id="{71B8893A-F325-44A6-8EFB-883C20332CFE}" type="slidenum">
               <a:rPr lang="en-US" smtClean="0"/>
               <a:pPr/>
-              <a:t>22</a:t>
+              <a:t>21</a:t>
             </a:fld>
             <a:endParaRPr lang="en-US"/>
           </a:p>
@@ -55725,7 +55361,7 @@
 </p:sld>
 </file>
 
-<file path=ppt/slides/slide23.xml><?xml version="1.0" encoding="utf-8"?>
+<file path=ppt/slides/slide22.xml><?xml version="1.0" encoding="utf-8"?>
 <p:sld xmlns:a="http://schemas.openxmlformats.org/drawingml/2006/main" xmlns:r="http://schemas.openxmlformats.org/officeDocument/2006/relationships" xmlns:p="http://schemas.openxmlformats.org/presentationml/2006/main">
   <p:cSld>
     <p:spTree>
@@ -55772,7 +55408,7 @@
             <a:fld id="{71B8893A-F325-44A6-8EFB-883C20332CFE}" type="slidenum">
               <a:rPr lang="en-US" smtClean="0"/>
               <a:pPr/>
-              <a:t>23</a:t>
+              <a:t>22</a:t>
             </a:fld>
             <a:endParaRPr lang="en-US"/>
           </a:p>
@@ -56513,7 +56149,7 @@
 </p:sld>
 </file>
 
-<file path=ppt/slides/slide24.xml><?xml version="1.0" encoding="utf-8"?>
+<file path=ppt/slides/slide23.xml><?xml version="1.0" encoding="utf-8"?>
 <p:sld xmlns:a="http://schemas.openxmlformats.org/drawingml/2006/main" xmlns:r="http://schemas.openxmlformats.org/officeDocument/2006/relationships" xmlns:p="http://schemas.openxmlformats.org/presentationml/2006/main">
   <p:cSld>
     <p:spTree>
@@ -56560,7 +56196,7 @@
             <a:fld id="{71B8893A-F325-44A6-8EFB-883C20332CFE}" type="slidenum">
               <a:rPr lang="en-US" smtClean="0"/>
               <a:pPr/>
-              <a:t>24</a:t>
+              <a:t>23</a:t>
             </a:fld>
             <a:endParaRPr lang="en-US"/>
           </a:p>
@@ -57145,7 +56781,7 @@
 </p:sld>
 </file>
 
-<file path=ppt/slides/slide25.xml><?xml version="1.0" encoding="utf-8"?>
+<file path=ppt/slides/slide24.xml><?xml version="1.0" encoding="utf-8"?>
 <p:sld xmlns:a="http://schemas.openxmlformats.org/drawingml/2006/main" xmlns:r="http://schemas.openxmlformats.org/officeDocument/2006/relationships" xmlns:p="http://schemas.openxmlformats.org/presentationml/2006/main">
   <p:cSld>
     <p:spTree>
@@ -57192,7 +56828,7 @@
             <a:fld id="{71B8893A-F325-44A6-8EFB-883C20332CFE}" type="slidenum">
               <a:rPr lang="en-US" smtClean="0"/>
               <a:pPr/>
-              <a:t>25</a:t>
+              <a:t>24</a:t>
             </a:fld>
             <a:endParaRPr lang="en-US"/>
           </a:p>
@@ -57712,7 +57348,7 @@
 </p:sld>
 </file>
 
-<file path=ppt/slides/slide26.xml><?xml version="1.0" encoding="utf-8"?>
+<file path=ppt/slides/slide25.xml><?xml version="1.0" encoding="utf-8"?>
 <p:sld xmlns:a="http://schemas.openxmlformats.org/drawingml/2006/main" xmlns:r="http://schemas.openxmlformats.org/officeDocument/2006/relationships" xmlns:p="http://schemas.openxmlformats.org/presentationml/2006/main">
   <p:cSld>
     <p:spTree>
@@ -57994,157 +57630,6 @@
   <p:cSld>
     <p:spTree>
       <p:nvGrpSpPr>
-        <p:cNvPr id="1" name="Shape 59"/>
-        <p:cNvGrpSpPr/>
-        <p:nvPr/>
-      </p:nvGrpSpPr>
-      <p:grpSpPr>
-        <a:xfrm>
-          <a:off x="0" y="0"/>
-          <a:ext cx="0" cy="0"/>
-          <a:chOff x="0" y="0"/>
-          <a:chExt cx="0" cy="0"/>
-        </a:xfrm>
-      </p:grpSpPr>
-      <p:sp>
-        <p:nvSpPr>
-          <p:cNvPr id="60" name="Google Shape;60;p14"/>
-          <p:cNvSpPr txBox="1">
-            <a:spLocks noGrp="1"/>
-          </p:cNvSpPr>
-          <p:nvPr>
-            <p:ph type="body" idx="1"/>
-          </p:nvPr>
-        </p:nvSpPr>
-        <p:spPr>
-          <a:xfrm>
-            <a:off x="311700" y="213675"/>
-            <a:ext cx="8520600" cy="4742700"/>
-          </a:xfrm>
-          <a:prstGeom prst="rect">
-            <a:avLst/>
-          </a:prstGeom>
-        </p:spPr>
-        <p:txBody>
-          <a:bodyPr spcFirstLastPara="1" wrap="square" lIns="91425" tIns="91425" rIns="91425" bIns="91425" anchor="t" anchorCtr="0">
-            <a:normAutofit fontScale="92500" lnSpcReduction="10000"/>
-          </a:bodyPr>
-          <a:lstStyle/>
-          <a:p>
-            <a:pPr marL="0" lvl="0" indent="0" algn="l" rtl="0">
-              <a:spcBef>
-                <a:spcPts val="0"/>
-              </a:spcBef>
-              <a:spcAft>
-                <a:spcPts val="0"/>
-              </a:spcAft>
-              <a:buNone/>
-            </a:pPr>
-            <a:r>
-              <a:rPr lang="en" sz="2500" b="1" u="sng" dirty="0"/>
-              <a:t>Problem 1</a:t>
-            </a:r>
-            <a:endParaRPr sz="2500" b="1" u="sng" dirty="0"/>
-          </a:p>
-          <a:p>
-            <a:pPr marL="0" lvl="0" indent="0" algn="l" rtl="0">
-              <a:spcBef>
-                <a:spcPts val="1200"/>
-              </a:spcBef>
-              <a:spcAft>
-                <a:spcPts val="0"/>
-              </a:spcAft>
-              <a:buNone/>
-            </a:pPr>
-            <a:r>
-              <a:rPr lang="en" sz="2500" dirty="0"/>
-              <a:t>Print the numbers from 1 to 100.  If the number is divisible by 3, print “Fizz” instead of the number.  If it is divisible by 5, print “Buzz” instead of the number.  If it is divisible by both, print “FizzBuzz” instead of the number.</a:t>
-            </a:r>
-            <a:endParaRPr sz="2500" dirty="0"/>
-          </a:p>
-          <a:p>
-            <a:pPr marL="0" lvl="0" indent="0" algn="l" rtl="0">
-              <a:spcBef>
-                <a:spcPts val="1200"/>
-              </a:spcBef>
-              <a:spcAft>
-                <a:spcPts val="0"/>
-              </a:spcAft>
-              <a:buNone/>
-            </a:pPr>
-            <a:endParaRPr sz="2500" dirty="0"/>
-          </a:p>
-          <a:p>
-            <a:pPr marL="0" lvl="0" indent="0" algn="l" rtl="0">
-              <a:spcBef>
-                <a:spcPts val="1200"/>
-              </a:spcBef>
-              <a:spcAft>
-                <a:spcPts val="0"/>
-              </a:spcAft>
-              <a:buNone/>
-            </a:pPr>
-            <a:r>
-              <a:rPr lang="en" sz="2500" b="1" u="sng" dirty="0"/>
-              <a:t>Problem 2</a:t>
-            </a:r>
-            <a:endParaRPr sz="2500" b="1" u="sng" dirty="0"/>
-          </a:p>
-          <a:p>
-            <a:pPr marL="0" lvl="0" indent="0" algn="l" rtl="0">
-              <a:spcBef>
-                <a:spcPts val="1200"/>
-              </a:spcBef>
-              <a:spcAft>
-                <a:spcPts val="0"/>
-              </a:spcAft>
-              <a:buNone/>
-            </a:pPr>
-            <a:r>
-              <a:rPr lang="en" sz="2500" dirty="0"/>
-              <a:t>Ask the user for “rock”, “paper”, or “scissors”.  Randomly assign the computer’s choice of “rock”, “paper”, or “scissors”. Display whether the user won, lost, or tied.</a:t>
-            </a:r>
-            <a:endParaRPr sz="2500" dirty="0"/>
-          </a:p>
-          <a:p>
-            <a:pPr marL="0" lvl="0" indent="0" algn="l" rtl="0">
-              <a:spcBef>
-                <a:spcPts val="1200"/>
-              </a:spcBef>
-              <a:spcAft>
-                <a:spcPts val="0"/>
-              </a:spcAft>
-              <a:buNone/>
-            </a:pPr>
-            <a:endParaRPr dirty="0"/>
-          </a:p>
-          <a:p>
-            <a:pPr marL="0" lvl="0" indent="0" algn="l" rtl="0">
-              <a:spcBef>
-                <a:spcPts val="1200"/>
-              </a:spcBef>
-              <a:spcAft>
-                <a:spcPts val="1200"/>
-              </a:spcAft>
-              <a:buNone/>
-            </a:pPr>
-            <a:endParaRPr dirty="0"/>
-          </a:p>
-        </p:txBody>
-      </p:sp>
-    </p:spTree>
-  </p:cSld>
-  <p:clrMapOvr>
-    <a:masterClrMapping/>
-  </p:clrMapOvr>
-</p:sld>
-</file>
-
-<file path=ppt/slides/slide6.xml><?xml version="1.0" encoding="utf-8"?>
-<p:sld xmlns:a="http://schemas.openxmlformats.org/drawingml/2006/main" xmlns:r="http://schemas.openxmlformats.org/officeDocument/2006/relationships" xmlns:p="http://schemas.openxmlformats.org/presentationml/2006/main">
-  <p:cSld>
-    <p:spTree>
-      <p:nvGrpSpPr>
         <p:cNvPr id="1" name="Shape 64"/>
         <p:cNvGrpSpPr/>
         <p:nvPr/>
@@ -58178,7 +57663,7 @@
         </p:spPr>
         <p:txBody>
           <a:bodyPr spcFirstLastPara="1" wrap="square" lIns="91425" tIns="91425" rIns="91425" bIns="91425" anchor="t" anchorCtr="0">
-            <a:normAutofit/>
+            <a:normAutofit lnSpcReduction="10000"/>
           </a:bodyPr>
           <a:lstStyle/>
           <a:p>
@@ -58237,6 +57722,26 @@
               <a:rPr lang="en-US" sz="2500" dirty="0"/>
               <a:t>Make a virtual environment with Python 3.10</a:t>
             </a:r>
+          </a:p>
+          <a:p>
+            <a:pPr marL="0" lvl="0" indent="0" algn="l" rtl="0">
+              <a:spcBef>
+                <a:spcPts val="0"/>
+              </a:spcBef>
+              <a:spcAft>
+                <a:spcPts val="0"/>
+              </a:spcAft>
+              <a:buNone/>
+            </a:pPr>
+            <a:r>
+              <a:rPr lang="en-US" sz="2500" dirty="0"/>
+              <a:t>	-pip install </a:t>
+            </a:r>
+            <a:r>
+              <a:rPr lang="en-US" sz="2500" dirty="0" err="1"/>
+              <a:t>pytorch</a:t>
+            </a:r>
+            <a:endParaRPr lang="en-US" sz="2500" dirty="0"/>
           </a:p>
           <a:p>
             <a:pPr marL="0" lvl="0" indent="0" algn="l" rtl="0">
@@ -58311,7 +57816,7 @@
 </p:sld>
 </file>
 
-<file path=ppt/slides/slide7.xml><?xml version="1.0" encoding="utf-8"?>
+<file path=ppt/slides/slide6.xml><?xml version="1.0" encoding="utf-8"?>
 <p:sld xmlns:a="http://schemas.openxmlformats.org/drawingml/2006/main" xmlns:r="http://schemas.openxmlformats.org/officeDocument/2006/relationships" xmlns:p="http://schemas.openxmlformats.org/presentationml/2006/main">
   <p:cSld>
     <p:spTree>
@@ -58554,7 +58059,7 @@
 </p:sld>
 </file>
 
-<file path=ppt/slides/slide8.xml><?xml version="1.0" encoding="utf-8"?>
+<file path=ppt/slides/slide7.xml><?xml version="1.0" encoding="utf-8"?>
 <p:sld xmlns:a="http://schemas.openxmlformats.org/drawingml/2006/main" xmlns:r="http://schemas.openxmlformats.org/officeDocument/2006/relationships" xmlns:p="http://schemas.openxmlformats.org/presentationml/2006/main">
   <p:cSld>
     <p:spTree>
@@ -58623,7 +58128,7 @@
 </p:sld>
 </file>
 
-<file path=ppt/slides/slide9.xml><?xml version="1.0" encoding="utf-8"?>
+<file path=ppt/slides/slide8.xml><?xml version="1.0" encoding="utf-8"?>
 <p:sld xmlns:a="http://schemas.openxmlformats.org/drawingml/2006/main" xmlns:r="http://schemas.openxmlformats.org/officeDocument/2006/relationships" xmlns:p="http://schemas.openxmlformats.org/presentationml/2006/main">
   <p:cSld>
     <p:spTree>
@@ -58664,7 +58169,7 @@
             <a:fld id="{71B8893A-F325-44A6-8EFB-883C20332CFE}" type="slidenum">
               <a:rPr lang="en-US" smtClean="0"/>
               <a:pPr/>
-              <a:t>9</a:t>
+              <a:t>8</a:t>
             </a:fld>
             <a:endParaRPr lang="en-US"/>
           </a:p>
@@ -58939,6 +58444,277 @@
     <p:extLst>
       <p:ext uri="{BB962C8B-B14F-4D97-AF65-F5344CB8AC3E}">
         <p14:creationId xmlns:p14="http://schemas.microsoft.com/office/powerpoint/2010/main" val="1359797099"/>
+      </p:ext>
+    </p:extLst>
+  </p:cSld>
+  <p:clrMapOvr>
+    <a:masterClrMapping/>
+  </p:clrMapOvr>
+</p:sld>
+</file>
+
+<file path=ppt/slides/slide9.xml><?xml version="1.0" encoding="utf-8"?>
+<p:sld xmlns:a="http://schemas.openxmlformats.org/drawingml/2006/main" xmlns:r="http://schemas.openxmlformats.org/officeDocument/2006/relationships" xmlns:p="http://schemas.openxmlformats.org/presentationml/2006/main">
+  <p:cSld>
+    <p:spTree>
+      <p:nvGrpSpPr>
+        <p:cNvPr id="1" name="Shape 64">
+          <a:extLst>
+            <a:ext uri="{FF2B5EF4-FFF2-40B4-BE49-F238E27FC236}">
+              <a16:creationId xmlns:a16="http://schemas.microsoft.com/office/drawing/2014/main" id="{2F35CFA6-B927-4D89-AB7B-DC2C347A9E50}"/>
+            </a:ext>
+          </a:extLst>
+        </p:cNvPr>
+        <p:cNvGrpSpPr/>
+        <p:nvPr/>
+      </p:nvGrpSpPr>
+      <p:grpSpPr>
+        <a:xfrm>
+          <a:off x="0" y="0"/>
+          <a:ext cx="0" cy="0"/>
+          <a:chOff x="0" y="0"/>
+          <a:chExt cx="0" cy="0"/>
+        </a:xfrm>
+      </p:grpSpPr>
+      <p:sp>
+        <p:nvSpPr>
+          <p:cNvPr id="65" name="Google Shape;65;p15">
+            <a:extLst>
+              <a:ext uri="{FF2B5EF4-FFF2-40B4-BE49-F238E27FC236}">
+                <a16:creationId xmlns:a16="http://schemas.microsoft.com/office/drawing/2014/main" id="{AED2004A-1A78-8127-2217-AE41406C2A12}"/>
+              </a:ext>
+            </a:extLst>
+          </p:cNvPr>
+          <p:cNvSpPr txBox="1">
+            <a:spLocks noGrp="1"/>
+          </p:cNvSpPr>
+          <p:nvPr>
+            <p:ph type="body" idx="1"/>
+          </p:nvPr>
+        </p:nvSpPr>
+        <p:spPr>
+          <a:xfrm>
+            <a:off x="311700" y="213675"/>
+            <a:ext cx="8520600" cy="4742700"/>
+          </a:xfrm>
+          <a:prstGeom prst="rect">
+            <a:avLst/>
+          </a:prstGeom>
+        </p:spPr>
+        <p:txBody>
+          <a:bodyPr spcFirstLastPara="1" wrap="square" lIns="91425" tIns="91425" rIns="91425" bIns="91425" anchor="t" anchorCtr="0">
+            <a:normAutofit/>
+          </a:bodyPr>
+          <a:lstStyle/>
+          <a:p>
+            <a:pPr marL="0" lvl="0" indent="0" algn="l" rtl="0">
+              <a:spcBef>
+                <a:spcPts val="0"/>
+              </a:spcBef>
+              <a:spcAft>
+                <a:spcPts val="0"/>
+              </a:spcAft>
+              <a:buNone/>
+            </a:pPr>
+            <a:r>
+              <a:rPr lang="en-US" sz="2500" b="1" dirty="0"/>
+              <a:t>Strings exploration</a:t>
+            </a:r>
+          </a:p>
+          <a:p>
+            <a:pPr marL="0" lvl="0" indent="0" algn="l" rtl="0">
+              <a:spcBef>
+                <a:spcPts val="0"/>
+              </a:spcBef>
+              <a:spcAft>
+                <a:spcPts val="0"/>
+              </a:spcAft>
+              <a:buNone/>
+            </a:pPr>
+            <a:endParaRPr lang="en-US" sz="2500" b="1" dirty="0"/>
+          </a:p>
+          <a:p>
+            <a:pPr marL="0" lvl="0" indent="0" algn="l" rtl="0">
+              <a:spcBef>
+                <a:spcPts val="0"/>
+              </a:spcBef>
+              <a:spcAft>
+                <a:spcPts val="0"/>
+              </a:spcAft>
+              <a:buNone/>
+            </a:pPr>
+            <a:endParaRPr lang="en-US" sz="1800" dirty="0"/>
+          </a:p>
+          <a:p>
+            <a:pPr marL="0" lvl="0" indent="0" algn="l" rtl="0">
+              <a:spcBef>
+                <a:spcPts val="0"/>
+              </a:spcBef>
+              <a:spcAft>
+                <a:spcPts val="0"/>
+              </a:spcAft>
+              <a:buNone/>
+            </a:pPr>
+            <a:endParaRPr lang="en-US" sz="1800" dirty="0"/>
+          </a:p>
+        </p:txBody>
+      </p:sp>
+      <p:sp>
+        <p:nvSpPr>
+          <p:cNvPr id="3" name="TextBox 2">
+            <a:extLst>
+              <a:ext uri="{FF2B5EF4-FFF2-40B4-BE49-F238E27FC236}">
+                <a16:creationId xmlns:a16="http://schemas.microsoft.com/office/drawing/2014/main" id="{042974E2-420F-A192-9719-7A2D27114A93}"/>
+              </a:ext>
+            </a:extLst>
+          </p:cNvPr>
+          <p:cNvSpPr txBox="1"/>
+          <p:nvPr/>
+        </p:nvSpPr>
+        <p:spPr>
+          <a:xfrm>
+            <a:off x="311699" y="935287"/>
+            <a:ext cx="7248827" cy="3693319"/>
+          </a:xfrm>
+          <a:prstGeom prst="rect">
+            <a:avLst/>
+          </a:prstGeom>
+          <a:noFill/>
+        </p:spPr>
+        <p:txBody>
+          <a:bodyPr wrap="square">
+            <a:spAutoFit/>
+          </a:bodyPr>
+          <a:lstStyle/>
+          <a:p>
+            <a:r>
+              <a:rPr lang="en-US" sz="1600" b="1" dirty="0"/>
+              <a:t>In your interactive terminal create the following variables and answer the following questions:</a:t>
+            </a:r>
+          </a:p>
+          <a:p>
+            <a:endParaRPr lang="en-US" sz="1600" b="1" dirty="0"/>
+          </a:p>
+          <a:p>
+            <a:r>
+              <a:rPr lang="en-US" sz="1600" dirty="0" err="1"/>
+              <a:t>my_list</a:t>
+            </a:r>
+            <a:r>
+              <a:rPr lang="en-US" sz="1600" dirty="0"/>
+              <a:t> = ['c', 'a', 't']</a:t>
+            </a:r>
+          </a:p>
+          <a:p>
+            <a:r>
+              <a:rPr lang="en-US" sz="1600" dirty="0" err="1"/>
+              <a:t>my_string</a:t>
+            </a:r>
+            <a:r>
+              <a:rPr lang="en-US" sz="1600" dirty="0"/>
+              <a:t> = "cat“</a:t>
+            </a:r>
+          </a:p>
+          <a:p>
+            <a:endParaRPr lang="en-US" dirty="0"/>
+          </a:p>
+          <a:p>
+            <a:endParaRPr lang="en-US" dirty="0"/>
+          </a:p>
+          <a:p>
+            <a:pPr marL="342900" indent="-342900">
+              <a:buAutoNum type="arabicParenR"/>
+            </a:pPr>
+            <a:r>
+              <a:rPr lang="en-US" dirty="0"/>
+              <a:t>Can you loop through both variables?</a:t>
+            </a:r>
+          </a:p>
+          <a:p>
+            <a:pPr marL="342900" indent="-342900">
+              <a:buAutoNum type="arabicParenR"/>
+            </a:pPr>
+            <a:endParaRPr lang="en-US" dirty="0"/>
+          </a:p>
+          <a:p>
+            <a:pPr marL="342900" indent="-342900">
+              <a:buAutoNum type="arabicParenR"/>
+            </a:pPr>
+            <a:r>
+              <a:rPr lang="en-US" dirty="0"/>
+              <a:t>Can you index and slice both variables?</a:t>
+            </a:r>
+          </a:p>
+          <a:p>
+            <a:pPr marL="342900" indent="-342900">
+              <a:buAutoNum type="arabicParenR"/>
+            </a:pPr>
+            <a:endParaRPr lang="en-US" dirty="0"/>
+          </a:p>
+          <a:p>
+            <a:pPr marL="342900" indent="-342900">
+              <a:buAutoNum type="arabicParenR"/>
+            </a:pPr>
+            <a:r>
+              <a:rPr lang="en-US" dirty="0"/>
+              <a:t>Can you use the </a:t>
+            </a:r>
+            <a:r>
+              <a:rPr lang="en-US" dirty="0" err="1"/>
+              <a:t>len</a:t>
+            </a:r>
+            <a:r>
+              <a:rPr lang="en-US" dirty="0"/>
+              <a:t>() function on both variables?</a:t>
+            </a:r>
+          </a:p>
+          <a:p>
+            <a:pPr marL="342900" indent="-342900">
+              <a:buAutoNum type="arabicParenR"/>
+            </a:pPr>
+            <a:endParaRPr lang="en-US" dirty="0"/>
+          </a:p>
+          <a:p>
+            <a:pPr marL="342900" indent="-342900">
+              <a:buAutoNum type="arabicParenR"/>
+            </a:pPr>
+            <a:r>
+              <a:rPr lang="en-US" dirty="0"/>
+              <a:t>Can you check for membership the same way for both variables?</a:t>
+            </a:r>
+            <a:br>
+              <a:rPr lang="en-US" dirty="0"/>
+            </a:br>
+            <a:r>
+              <a:rPr lang="en-US" dirty="0"/>
+              <a:t>	print('a' in </a:t>
+            </a:r>
+            <a:r>
+              <a:rPr lang="en-US" dirty="0" err="1"/>
+              <a:t>my_list</a:t>
+            </a:r>
+            <a:r>
+              <a:rPr lang="en-US" dirty="0"/>
+              <a:t>, 'a' in </a:t>
+            </a:r>
+            <a:r>
+              <a:rPr lang="en-US" dirty="0" err="1"/>
+              <a:t>my_string</a:t>
+            </a:r>
+            <a:r>
+              <a:rPr lang="en-US" dirty="0"/>
+              <a:t>)</a:t>
+            </a:r>
+          </a:p>
+          <a:p>
+            <a:endParaRPr lang="en-US" sz="1400" dirty="0"/>
+          </a:p>
+        </p:txBody>
+      </p:sp>
+    </p:spTree>
+    <p:extLst>
+      <p:ext uri="{BB962C8B-B14F-4D97-AF65-F5344CB8AC3E}">
+        <p14:creationId xmlns:p14="http://schemas.microsoft.com/office/powerpoint/2010/main" val="891458789"/>
       </p:ext>
     </p:extLst>
   </p:cSld>
